--- a/BaoCaoTienDo_Tuan1-3_52300057_52300006.pptx
+++ b/BaoCaoTienDo_Tuan1-3_52300057_52300006.pptx
@@ -22,8 +22,6 @@
     <p:sldId id="270" r:id="rId21"/>
     <p:sldId id="271" r:id="rId22"/>
     <p:sldId id="272" r:id="rId23"/>
-    <p:sldId id="273" r:id="rId24"/>
-    <p:sldId id="274" r:id="rId25"/>
   </p:sldIdLst>
   <p:sldSz cx="12191695" cy="6858000" type="screen4x3"/>
   <p:notesSz cx="6858000" cy="9144000"/>
@@ -5318,7 +5316,7 @@
                 </a:solidFill>
                 <a:latin typeface="Helvetica Neue"/>
               </a:rPr>
-              <a:t>HƯỚNG TIẾP THEO</a:t>
+              <a:t>TRẢ LỜI CÂU HỎI ĐỀ TÀI</a:t>
             </a:r>
           </a:p>
         </p:txBody>
@@ -5399,7 +5397,7 @@
                 </a:solidFill>
                 <a:latin typeface="Georgia"/>
               </a:rPr>
-              <a:t>Lỗi phải xảy ra nhiều tới mức nào mới gây hại?</a:t>
+              <a:t>Model không giỏi lên, cũng không học theo máy chấm</a:t>
             </a:r>
           </a:p>
         </p:txBody>
@@ -5412,69 +5410,125 @@
         </p:nvSpPr>
         <p:spPr>
           <a:xfrm>
-            <a:off x="800100" y="1600000"/>
-            <a:ext cx="10591495" cy="500000"/>
-          </a:xfrm>
-          <a:prstGeom prst="rect">
-            <a:avLst/>
-          </a:prstGeom>
-          <a:noFill/>
-        </p:spPr>
-        <p:txBody>
-          <a:bodyPr wrap="square" lIns="0" rIns="0" tIns="0" bIns="0">
-            <a:spAutoFit/>
-          </a:bodyPr>
-          <a:lstStyle/>
-          <a:p>
-            <a:pPr algn="l">
-              <a:lnSpc>
-                <a:spcPct val="145000"/>
-              </a:lnSpc>
-              <a:spcAft>
-                <a:spcPts val="600"/>
-              </a:spcAft>
-            </a:pPr>
-            <a:r>
-              <a:rPr sz="1350" b="0">
-                <a:solidFill>
-                  <a:srgbClr val="3F4149"/>
-                </a:solidFill>
-                <a:latin typeface="Helvetica Neue"/>
-              </a:rPr>
-              <a:t>Bài học từ ba tuần: một lỗi máy chấm nặng tới đâu cũng chỉ hại đúng bằng số lần nó xảy ra.</a:t>
-            </a:r>
-          </a:p>
-          <a:p>
-            <a:pPr algn="l">
-              <a:lnSpc>
-                <a:spcPct val="145000"/>
-              </a:lnSpc>
-              <a:spcAft>
-                <a:spcPts val="600"/>
-              </a:spcAft>
-            </a:pPr>
-            <a:r>
-              <a:rPr sz="1350" b="0">
-                <a:solidFill>
-                  <a:srgbClr val="3F4149"/>
-                </a:solidFill>
-                <a:latin typeface="Helvetica Neue"/>
-              </a:rPr>
-              <a:t>Mới thử một lỗi rất hiếm. Bước tiếp theo là thử một lỗi phổ biến hơn nhiều.</a:t>
-            </a:r>
-          </a:p>
-        </p:txBody>
-      </p:sp>
-      <p:sp>
-        <p:nvSpPr>
-          <p:cNvPr id="6" name="Rounded Rectangle 5"/>
+            <a:off x="920100" y="1600000"/>
+            <a:ext cx="5100000" cy="300000"/>
+          </a:xfrm>
+          <a:prstGeom prst="rect">
+            <a:avLst/>
+          </a:prstGeom>
+          <a:noFill/>
+        </p:spPr>
+        <p:txBody>
+          <a:bodyPr wrap="square" lIns="0" rIns="0" tIns="0" bIns="0">
+            <a:spAutoFit/>
+          </a:bodyPr>
+          <a:lstStyle/>
+          <a:p>
+            <a:pPr algn="l">
+              <a:spcAft>
+                <a:spcPts val="600"/>
+              </a:spcAft>
+            </a:pPr>
+            <a:r>
+              <a:rPr sz="1100" b="1">
+                <a:solidFill>
+                  <a:srgbClr val="8A8D96"/>
+                </a:solidFill>
+                <a:latin typeface="Helvetica Neue"/>
+              </a:rPr>
+              <a:t>SAU 4 VÒNG TỰ HỌC</a:t>
+            </a:r>
+          </a:p>
+        </p:txBody>
+      </p:sp>
+      <p:sp>
+        <p:nvSpPr>
+          <p:cNvPr id="6" name="TextBox 5"/>
+          <p:cNvSpPr txBox="1"/>
+          <p:nvPr/>
+        </p:nvSpPr>
+        <p:spPr>
+          <a:xfrm>
+            <a:off x="6300100" y="1600000"/>
+            <a:ext cx="2500000" cy="300000"/>
+          </a:xfrm>
+          <a:prstGeom prst="rect">
+            <a:avLst/>
+          </a:prstGeom>
+          <a:noFill/>
+        </p:spPr>
+        <p:txBody>
+          <a:bodyPr wrap="square" lIns="0" rIns="0" tIns="0" bIns="0">
+            <a:spAutoFit/>
+          </a:bodyPr>
+          <a:lstStyle/>
+          <a:p>
+            <a:pPr algn="l">
+              <a:spcAft>
+                <a:spcPts val="600"/>
+              </a:spcAft>
+            </a:pPr>
+            <a:r>
+              <a:rPr sz="1100" b="1">
+                <a:solidFill>
+                  <a:srgbClr val="8A8D96"/>
+                </a:solidFill>
+                <a:latin typeface="Helvetica Neue"/>
+              </a:rPr>
+              <a:t>MATH-500</a:t>
+            </a:r>
+          </a:p>
+        </p:txBody>
+      </p:sp>
+      <p:sp>
+        <p:nvSpPr>
+          <p:cNvPr id="7" name="TextBox 6"/>
+          <p:cNvSpPr txBox="1"/>
+          <p:nvPr/>
+        </p:nvSpPr>
+        <p:spPr>
+          <a:xfrm>
+            <a:off x="9000100" y="1600000"/>
+            <a:ext cx="2300000" cy="300000"/>
+          </a:xfrm>
+          <a:prstGeom prst="rect">
+            <a:avLst/>
+          </a:prstGeom>
+          <a:noFill/>
+        </p:spPr>
+        <p:txBody>
+          <a:bodyPr wrap="square" lIns="0" rIns="0" tIns="0" bIns="0">
+            <a:spAutoFit/>
+          </a:bodyPr>
+          <a:lstStyle/>
+          <a:p>
+            <a:pPr algn="l">
+              <a:spcAft>
+                <a:spcPts val="600"/>
+              </a:spcAft>
+            </a:pPr>
+            <a:r>
+              <a:rPr sz="1100" b="1">
+                <a:solidFill>
+                  <a:srgbClr val="8A8D96"/>
+                </a:solidFill>
+                <a:latin typeface="Helvetica Neue"/>
+              </a:rPr>
+              <a:t>GSM8K</a:t>
+            </a:r>
+          </a:p>
+        </p:txBody>
+      </p:sp>
+      <p:sp>
+        <p:nvSpPr>
+          <p:cNvPr id="8" name="Rounded Rectangle 7"/>
           <p:cNvSpPr/>
           <p:nvPr/>
         </p:nvSpPr>
         <p:spPr>
           <a:xfrm>
-            <a:off x="800100" y="2650000"/>
-            <a:ext cx="5190000" cy="2500000"/>
+            <a:off x="680100" y="1980000"/>
+            <a:ext cx="10831495" cy="2170000"/>
           </a:xfrm>
           <a:prstGeom prst="roundRect">
             <a:avLst>
@@ -5513,22 +5567,747 @@
       </p:sp>
       <p:sp>
         <p:nvSpPr>
-          <p:cNvPr id="7" name="Rounded Rectangle 6"/>
+          <p:cNvPr id="9" name="TextBox 8"/>
+          <p:cNvSpPr txBox="1"/>
+          <p:nvPr/>
+        </p:nvSpPr>
+        <p:spPr>
+          <a:xfrm>
+            <a:off x="920100" y="2120000"/>
+            <a:ext cx="5100000" cy="330000"/>
+          </a:xfrm>
+          <a:prstGeom prst="rect">
+            <a:avLst/>
+          </a:prstGeom>
+          <a:noFill/>
+        </p:spPr>
+        <p:txBody>
+          <a:bodyPr wrap="square" lIns="0" rIns="0" tIns="0" bIns="0">
+            <a:spAutoFit/>
+          </a:bodyPr>
+          <a:lstStyle/>
+          <a:p>
+            <a:pPr algn="l">
+              <a:spcAft>
+                <a:spcPts val="600"/>
+              </a:spcAft>
+            </a:pPr>
+            <a:r>
+              <a:rPr sz="1250" b="0">
+                <a:solidFill>
+                  <a:srgbClr val="3F4149"/>
+                </a:solidFill>
+                <a:latin typeface="Helvetica Neue"/>
+              </a:rPr>
+              <a:t>pass@1, vòng 0 → 4</a:t>
+            </a:r>
+          </a:p>
+        </p:txBody>
+      </p:sp>
+      <p:sp>
+        <p:nvSpPr>
+          <p:cNvPr id="10" name="TextBox 9"/>
+          <p:cNvSpPr txBox="1"/>
+          <p:nvPr/>
+        </p:nvSpPr>
+        <p:spPr>
+          <a:xfrm>
+            <a:off x="6300100" y="2120000"/>
+            <a:ext cx="2500000" cy="330000"/>
+          </a:xfrm>
+          <a:prstGeom prst="rect">
+            <a:avLst/>
+          </a:prstGeom>
+          <a:noFill/>
+        </p:spPr>
+        <p:txBody>
+          <a:bodyPr wrap="square" lIns="0" rIns="0" tIns="0" bIns="0">
+            <a:spAutoFit/>
+          </a:bodyPr>
+          <a:lstStyle/>
+          <a:p>
+            <a:pPr algn="l">
+              <a:spcAft>
+                <a:spcPts val="600"/>
+              </a:spcAft>
+            </a:pPr>
+            <a:r>
+              <a:rPr sz="1250" b="0">
+                <a:solidFill>
+                  <a:srgbClr val="3F4149"/>
+                </a:solidFill>
+                <a:latin typeface="Helvetica Neue"/>
+              </a:rPr>
+              <a:t>32,0% → 29,3%</a:t>
+            </a:r>
+          </a:p>
+        </p:txBody>
+      </p:sp>
+      <p:sp>
+        <p:nvSpPr>
+          <p:cNvPr id="11" name="TextBox 10"/>
+          <p:cNvSpPr txBox="1"/>
+          <p:nvPr/>
+        </p:nvSpPr>
+        <p:spPr>
+          <a:xfrm>
+            <a:off x="9000100" y="2120000"/>
+            <a:ext cx="2300000" cy="330000"/>
+          </a:xfrm>
+          <a:prstGeom prst="rect">
+            <a:avLst/>
+          </a:prstGeom>
+          <a:noFill/>
+        </p:spPr>
+        <p:txBody>
+          <a:bodyPr wrap="square" lIns="0" rIns="0" tIns="0" bIns="0">
+            <a:spAutoFit/>
+          </a:bodyPr>
+          <a:lstStyle/>
+          <a:p>
+            <a:pPr algn="l">
+              <a:spcAft>
+                <a:spcPts val="600"/>
+              </a:spcAft>
+            </a:pPr>
+            <a:r>
+              <a:rPr sz="1250" b="0">
+                <a:solidFill>
+                  <a:srgbClr val="3F4149"/>
+                </a:solidFill>
+                <a:latin typeface="Helvetica Neue"/>
+              </a:rPr>
+              <a:t>66,7% → 54,0%</a:t>
+            </a:r>
+          </a:p>
+        </p:txBody>
+      </p:sp>
+      <p:cxnSp>
+        <p:nvCxnSpPr>
+          <p:cNvPr id="12" name="Connector 11"/>
+          <p:cNvCxnSpPr/>
+          <p:nvPr/>
+        </p:nvCxnSpPr>
+        <p:spPr>
+          <a:xfrm>
+            <a:off x="760100" y="2465000"/>
+            <a:ext cx="10671495" cy="0"/>
+          </a:xfrm>
+          <a:prstGeom prst="line">
+            <a:avLst/>
+          </a:prstGeom>
+          <a:ln w="9525">
+            <a:solidFill>
+              <a:srgbClr val="E9E9ED"/>
+            </a:solidFill>
+          </a:ln>
+        </p:spPr>
+        <p:style>
+          <a:lnRef idx="2">
+            <a:schemeClr val="accent1"/>
+          </a:lnRef>
+          <a:fillRef idx="0">
+            <a:schemeClr val="accent1"/>
+          </a:fillRef>
+          <a:effectRef idx="1">
+            <a:schemeClr val="accent1"/>
+          </a:effectRef>
+          <a:fontRef idx="minor">
+            <a:schemeClr val="tx1"/>
+          </a:fontRef>
+        </p:style>
+      </p:cxnSp>
+      <p:sp>
+        <p:nvSpPr>
+          <p:cNvPr id="13" name="TextBox 12"/>
+          <p:cNvSpPr txBox="1"/>
+          <p:nvPr/>
+        </p:nvSpPr>
+        <p:spPr>
+          <a:xfrm>
+            <a:off x="920100" y="2520000"/>
+            <a:ext cx="5100000" cy="330000"/>
+          </a:xfrm>
+          <a:prstGeom prst="rect">
+            <a:avLst/>
+          </a:prstGeom>
+          <a:noFill/>
+        </p:spPr>
+        <p:txBody>
+          <a:bodyPr wrap="square" lIns="0" rIns="0" tIns="0" bIns="0">
+            <a:spAutoFit/>
+          </a:bodyPr>
+          <a:lstStyle/>
+          <a:p>
+            <a:pPr algn="l">
+              <a:spcAft>
+                <a:spcPts val="600"/>
+              </a:spcAft>
+            </a:pPr>
+            <a:r>
+              <a:rPr sz="1250" b="0">
+                <a:solidFill>
+                  <a:srgbClr val="3F4149"/>
+                </a:solidFill>
+                <a:latin typeface="Helvetica Neue"/>
+              </a:rPr>
+              <a:t>pass@8, vòng 0 → 4</a:t>
+            </a:r>
+          </a:p>
+        </p:txBody>
+      </p:sp>
+      <p:sp>
+        <p:nvSpPr>
+          <p:cNvPr id="14" name="TextBox 13"/>
+          <p:cNvSpPr txBox="1"/>
+          <p:nvPr/>
+        </p:nvSpPr>
+        <p:spPr>
+          <a:xfrm>
+            <a:off x="6300100" y="2520000"/>
+            <a:ext cx="2500000" cy="330000"/>
+          </a:xfrm>
+          <a:prstGeom prst="rect">
+            <a:avLst/>
+          </a:prstGeom>
+          <a:noFill/>
+        </p:spPr>
+        <p:txBody>
+          <a:bodyPr wrap="square" lIns="0" rIns="0" tIns="0" bIns="0">
+            <a:spAutoFit/>
+          </a:bodyPr>
+          <a:lstStyle/>
+          <a:p>
+            <a:pPr algn="l">
+              <a:spcAft>
+                <a:spcPts val="600"/>
+              </a:spcAft>
+            </a:pPr>
+            <a:r>
+              <a:rPr sz="1250" b="0">
+                <a:solidFill>
+                  <a:srgbClr val="3F4149"/>
+                </a:solidFill>
+                <a:latin typeface="Helvetica Neue"/>
+              </a:rPr>
+              <a:t>57,3% → 56,0%</a:t>
+            </a:r>
+          </a:p>
+        </p:txBody>
+      </p:sp>
+      <p:sp>
+        <p:nvSpPr>
+          <p:cNvPr id="15" name="TextBox 14"/>
+          <p:cNvSpPr txBox="1"/>
+          <p:nvPr/>
+        </p:nvSpPr>
+        <p:spPr>
+          <a:xfrm>
+            <a:off x="9000100" y="2520000"/>
+            <a:ext cx="2300000" cy="330000"/>
+          </a:xfrm>
+          <a:prstGeom prst="rect">
+            <a:avLst/>
+          </a:prstGeom>
+          <a:noFill/>
+        </p:spPr>
+        <p:txBody>
+          <a:bodyPr wrap="square" lIns="0" rIns="0" tIns="0" bIns="0">
+            <a:spAutoFit/>
+          </a:bodyPr>
+          <a:lstStyle/>
+          <a:p>
+            <a:pPr algn="l">
+              <a:spcAft>
+                <a:spcPts val="600"/>
+              </a:spcAft>
+            </a:pPr>
+            <a:r>
+              <a:rPr sz="1250" b="0">
+                <a:solidFill>
+                  <a:srgbClr val="3F4149"/>
+                </a:solidFill>
+                <a:latin typeface="Helvetica Neue"/>
+              </a:rPr>
+              <a:t>92,7% → 90,0%</a:t>
+            </a:r>
+          </a:p>
+        </p:txBody>
+      </p:sp>
+      <p:cxnSp>
+        <p:nvCxnSpPr>
+          <p:cNvPr id="16" name="Connector 15"/>
+          <p:cNvCxnSpPr/>
+          <p:nvPr/>
+        </p:nvCxnSpPr>
+        <p:spPr>
+          <a:xfrm>
+            <a:off x="760100" y="2865000"/>
+            <a:ext cx="10671495" cy="0"/>
+          </a:xfrm>
+          <a:prstGeom prst="line">
+            <a:avLst/>
+          </a:prstGeom>
+          <a:ln w="9525">
+            <a:solidFill>
+              <a:srgbClr val="E9E9ED"/>
+            </a:solidFill>
+          </a:ln>
+        </p:spPr>
+        <p:style>
+          <a:lnRef idx="2">
+            <a:schemeClr val="accent1"/>
+          </a:lnRef>
+          <a:fillRef idx="0">
+            <a:schemeClr val="accent1"/>
+          </a:fillRef>
+          <a:effectRef idx="1">
+            <a:schemeClr val="accent1"/>
+          </a:effectRef>
+          <a:fontRef idx="minor">
+            <a:schemeClr val="tx1"/>
+          </a:fontRef>
+        </p:style>
+      </p:cxnSp>
+      <p:sp>
+        <p:nvSpPr>
+          <p:cNvPr id="17" name="TextBox 16"/>
+          <p:cNvSpPr txBox="1"/>
+          <p:nvPr/>
+        </p:nvSpPr>
+        <p:spPr>
+          <a:xfrm>
+            <a:off x="920100" y="2920000"/>
+            <a:ext cx="5100000" cy="330000"/>
+          </a:xfrm>
+          <a:prstGeom prst="rect">
+            <a:avLst/>
+          </a:prstGeom>
+          <a:noFill/>
+        </p:spPr>
+        <p:txBody>
+          <a:bodyPr wrap="square" lIns="0" rIns="0" tIns="0" bIns="0">
+            <a:spAutoFit/>
+          </a:bodyPr>
+          <a:lstStyle/>
+          <a:p>
+            <a:pPr algn="l">
+              <a:spcAft>
+                <a:spcPts val="600"/>
+              </a:spcAft>
+            </a:pPr>
+            <a:r>
+              <a:rPr sz="1250" b="0">
+                <a:solidFill>
+                  <a:srgbClr val="3F4149"/>
+                </a:solidFill>
+                <a:latin typeface="Helvetica Neue"/>
+              </a:rPr>
+              <a:t>Đề giải thêm được / đề mất đi (150 đề thi)</a:t>
+            </a:r>
+          </a:p>
+        </p:txBody>
+      </p:sp>
+      <p:sp>
+        <p:nvSpPr>
+          <p:cNvPr id="18" name="TextBox 17"/>
+          <p:cNvSpPr txBox="1"/>
+          <p:nvPr/>
+        </p:nvSpPr>
+        <p:spPr>
+          <a:xfrm>
+            <a:off x="6300100" y="2920000"/>
+            <a:ext cx="2500000" cy="330000"/>
+          </a:xfrm>
+          <a:prstGeom prst="rect">
+            <a:avLst/>
+          </a:prstGeom>
+          <a:noFill/>
+        </p:spPr>
+        <p:txBody>
+          <a:bodyPr wrap="square" lIns="0" rIns="0" tIns="0" bIns="0">
+            <a:spAutoFit/>
+          </a:bodyPr>
+          <a:lstStyle/>
+          <a:p>
+            <a:pPr algn="l">
+              <a:spcAft>
+                <a:spcPts val="600"/>
+              </a:spcAft>
+            </a:pPr>
+            <a:r>
+              <a:rPr sz="1250" b="0">
+                <a:solidFill>
+                  <a:srgbClr val="3F4149"/>
+                </a:solidFill>
+                <a:latin typeface="Helvetica Neue"/>
+              </a:rPr>
+              <a:t>32 / 34</a:t>
+            </a:r>
+          </a:p>
+        </p:txBody>
+      </p:sp>
+      <p:sp>
+        <p:nvSpPr>
+          <p:cNvPr id="19" name="TextBox 18"/>
+          <p:cNvSpPr txBox="1"/>
+          <p:nvPr/>
+        </p:nvSpPr>
+        <p:spPr>
+          <a:xfrm>
+            <a:off x="9000100" y="2920000"/>
+            <a:ext cx="2300000" cy="330000"/>
+          </a:xfrm>
+          <a:prstGeom prst="rect">
+            <a:avLst/>
+          </a:prstGeom>
+          <a:noFill/>
+        </p:spPr>
+        <p:txBody>
+          <a:bodyPr wrap="square" lIns="0" rIns="0" tIns="0" bIns="0">
+            <a:spAutoFit/>
+          </a:bodyPr>
+          <a:lstStyle/>
+          <a:p>
+            <a:pPr algn="l">
+              <a:spcAft>
+                <a:spcPts val="600"/>
+              </a:spcAft>
+            </a:pPr>
+            <a:r>
+              <a:rPr sz="1250" b="0">
+                <a:solidFill>
+                  <a:srgbClr val="3F4149"/>
+                </a:solidFill>
+                <a:latin typeface="Helvetica Neue"/>
+              </a:rPr>
+              <a:t>16 / 20</a:t>
+            </a:r>
+          </a:p>
+        </p:txBody>
+      </p:sp>
+      <p:cxnSp>
+        <p:nvCxnSpPr>
+          <p:cNvPr id="20" name="Connector 19"/>
+          <p:cNvCxnSpPr/>
+          <p:nvPr/>
+        </p:nvCxnSpPr>
+        <p:spPr>
+          <a:xfrm>
+            <a:off x="760100" y="3265000"/>
+            <a:ext cx="10671495" cy="0"/>
+          </a:xfrm>
+          <a:prstGeom prst="line">
+            <a:avLst/>
+          </a:prstGeom>
+          <a:ln w="9525">
+            <a:solidFill>
+              <a:srgbClr val="E9E9ED"/>
+            </a:solidFill>
+          </a:ln>
+        </p:spPr>
+        <p:style>
+          <a:lnRef idx="2">
+            <a:schemeClr val="accent1"/>
+          </a:lnRef>
+          <a:fillRef idx="0">
+            <a:schemeClr val="accent1"/>
+          </a:fillRef>
+          <a:effectRef idx="1">
+            <a:schemeClr val="accent1"/>
+          </a:effectRef>
+          <a:fontRef idx="minor">
+            <a:schemeClr val="tx1"/>
+          </a:fontRef>
+        </p:style>
+      </p:cxnSp>
+      <p:sp>
+        <p:nvSpPr>
+          <p:cNvPr id="21" name="TextBox 20"/>
+          <p:cNvSpPr txBox="1"/>
+          <p:nvPr/>
+        </p:nvSpPr>
+        <p:spPr>
+          <a:xfrm>
+            <a:off x="920100" y="3320000"/>
+            <a:ext cx="5100000" cy="330000"/>
+          </a:xfrm>
+          <a:prstGeom prst="rect">
+            <a:avLst/>
+          </a:prstGeom>
+          <a:noFill/>
+        </p:spPr>
+        <p:txBody>
+          <a:bodyPr wrap="square" lIns="0" rIns="0" tIns="0" bIns="0">
+            <a:spAutoFit/>
+          </a:bodyPr>
+          <a:lstStyle/>
+          <a:p>
+            <a:pPr algn="l">
+              <a:spcAft>
+                <a:spcPts val="600"/>
+              </a:spcAft>
+            </a:pPr>
+            <a:r>
+              <a:rPr sz="1250" b="0">
+                <a:solidFill>
+                  <a:srgbClr val="3F4149"/>
+                </a:solidFill>
+                <a:latin typeface="Helvetica Neue"/>
+              </a:rPr>
+              <a:t>Số lời giải có \boxed (trong 4.000 lời giải)</a:t>
+            </a:r>
+          </a:p>
+        </p:txBody>
+      </p:sp>
+      <p:sp>
+        <p:nvSpPr>
+          <p:cNvPr id="22" name="TextBox 21"/>
+          <p:cNvSpPr txBox="1"/>
+          <p:nvPr/>
+        </p:nvSpPr>
+        <p:spPr>
+          <a:xfrm>
+            <a:off x="6300100" y="3320000"/>
+            <a:ext cx="2500000" cy="330000"/>
+          </a:xfrm>
+          <a:prstGeom prst="rect">
+            <a:avLst/>
+          </a:prstGeom>
+          <a:noFill/>
+        </p:spPr>
+        <p:txBody>
+          <a:bodyPr wrap="square" lIns="0" rIns="0" tIns="0" bIns="0">
+            <a:spAutoFit/>
+          </a:bodyPr>
+          <a:lstStyle/>
+          <a:p>
+            <a:pPr algn="l">
+              <a:spcAft>
+                <a:spcPts val="600"/>
+              </a:spcAft>
+            </a:pPr>
+            <a:r>
+              <a:rPr sz="1250" b="0">
+                <a:solidFill>
+                  <a:srgbClr val="3F4149"/>
+                </a:solidFill>
+                <a:latin typeface="Helvetica Neue"/>
+              </a:rPr>
+              <a:t>2.136 → 1.999</a:t>
+            </a:r>
+          </a:p>
+        </p:txBody>
+      </p:sp>
+      <p:sp>
+        <p:nvSpPr>
+          <p:cNvPr id="23" name="TextBox 22"/>
+          <p:cNvSpPr txBox="1"/>
+          <p:nvPr/>
+        </p:nvSpPr>
+        <p:spPr>
+          <a:xfrm>
+            <a:off x="9000100" y="3320000"/>
+            <a:ext cx="2300000" cy="330000"/>
+          </a:xfrm>
+          <a:prstGeom prst="rect">
+            <a:avLst/>
+          </a:prstGeom>
+          <a:noFill/>
+        </p:spPr>
+        <p:txBody>
+          <a:bodyPr wrap="square" lIns="0" rIns="0" tIns="0" bIns="0">
+            <a:spAutoFit/>
+          </a:bodyPr>
+          <a:lstStyle/>
+          <a:p>
+            <a:pPr algn="l">
+              <a:spcAft>
+                <a:spcPts val="600"/>
+              </a:spcAft>
+            </a:pPr>
+            <a:r>
+              <a:rPr sz="1250" b="0">
+                <a:solidFill>
+                  <a:srgbClr val="3F4149"/>
+                </a:solidFill>
+                <a:latin typeface="Helvetica Neue"/>
+              </a:rPr>
+              <a:t>3.466 → 2.926</a:t>
+            </a:r>
+          </a:p>
+        </p:txBody>
+      </p:sp>
+      <p:cxnSp>
+        <p:nvCxnSpPr>
+          <p:cNvPr id="24" name="Connector 23"/>
+          <p:cNvCxnSpPr/>
+          <p:nvPr/>
+        </p:nvCxnSpPr>
+        <p:spPr>
+          <a:xfrm>
+            <a:off x="760100" y="3665000"/>
+            <a:ext cx="10671495" cy="0"/>
+          </a:xfrm>
+          <a:prstGeom prst="line">
+            <a:avLst/>
+          </a:prstGeom>
+          <a:ln w="9525">
+            <a:solidFill>
+              <a:srgbClr val="E9E9ED"/>
+            </a:solidFill>
+          </a:ln>
+        </p:spPr>
+        <p:style>
+          <a:lnRef idx="2">
+            <a:schemeClr val="accent1"/>
+          </a:lnRef>
+          <a:fillRef idx="0">
+            <a:schemeClr val="accent1"/>
+          </a:fillRef>
+          <a:effectRef idx="1">
+            <a:schemeClr val="accent1"/>
+          </a:effectRef>
+          <a:fontRef idx="minor">
+            <a:schemeClr val="tx1"/>
+          </a:fontRef>
+        </p:style>
+      </p:cxnSp>
+      <p:sp>
+        <p:nvSpPr>
+          <p:cNvPr id="25" name="TextBox 24"/>
+          <p:cNvSpPr txBox="1"/>
+          <p:nvPr/>
+        </p:nvSpPr>
+        <p:spPr>
+          <a:xfrm>
+            <a:off x="920100" y="3720000"/>
+            <a:ext cx="5100000" cy="330000"/>
+          </a:xfrm>
+          <a:prstGeom prst="rect">
+            <a:avLst/>
+          </a:prstGeom>
+          <a:noFill/>
+        </p:spPr>
+        <p:txBody>
+          <a:bodyPr wrap="square" lIns="0" rIns="0" tIns="0" bIns="0">
+            <a:spAutoFit/>
+          </a:bodyPr>
+          <a:lstStyle/>
+          <a:p>
+            <a:pPr algn="l">
+              <a:spcAft>
+                <a:spcPts val="600"/>
+              </a:spcAft>
+            </a:pPr>
+            <a:r>
+              <a:rPr sz="1250" b="0">
+                <a:solidFill>
+                  <a:srgbClr val="3F4149"/>
+                </a:solidFill>
+                <a:latin typeface="Helvetica Neue"/>
+              </a:rPr>
+              <a:t>Tỉ lệ đáp án khác nhau trong 8 lần làm</a:t>
+            </a:r>
+          </a:p>
+        </p:txBody>
+      </p:sp>
+      <p:sp>
+        <p:nvSpPr>
+          <p:cNvPr id="26" name="TextBox 25"/>
+          <p:cNvSpPr txBox="1"/>
+          <p:nvPr/>
+        </p:nvSpPr>
+        <p:spPr>
+          <a:xfrm>
+            <a:off x="6300100" y="3720000"/>
+            <a:ext cx="2500000" cy="330000"/>
+          </a:xfrm>
+          <a:prstGeom prst="rect">
+            <a:avLst/>
+          </a:prstGeom>
+          <a:noFill/>
+        </p:spPr>
+        <p:txBody>
+          <a:bodyPr wrap="square" lIns="0" rIns="0" tIns="0" bIns="0">
+            <a:spAutoFit/>
+          </a:bodyPr>
+          <a:lstStyle/>
+          <a:p>
+            <a:pPr algn="l">
+              <a:spcAft>
+                <a:spcPts val="600"/>
+              </a:spcAft>
+            </a:pPr>
+            <a:r>
+              <a:rPr sz="1250" b="0">
+                <a:solidFill>
+                  <a:srgbClr val="3F4149"/>
+                </a:solidFill>
+                <a:latin typeface="Helvetica Neue"/>
+              </a:rPr>
+              <a:t>0,54 → 0,55</a:t>
+            </a:r>
+          </a:p>
+        </p:txBody>
+      </p:sp>
+      <p:sp>
+        <p:nvSpPr>
+          <p:cNvPr id="27" name="TextBox 26"/>
+          <p:cNvSpPr txBox="1"/>
+          <p:nvPr/>
+        </p:nvSpPr>
+        <p:spPr>
+          <a:xfrm>
+            <a:off x="9000100" y="3720000"/>
+            <a:ext cx="2300000" cy="330000"/>
+          </a:xfrm>
+          <a:prstGeom prst="rect">
+            <a:avLst/>
+          </a:prstGeom>
+          <a:noFill/>
+        </p:spPr>
+        <p:txBody>
+          <a:bodyPr wrap="square" lIns="0" rIns="0" tIns="0" bIns="0">
+            <a:spAutoFit/>
+          </a:bodyPr>
+          <a:lstStyle/>
+          <a:p>
+            <a:pPr algn="l">
+              <a:spcAft>
+                <a:spcPts val="600"/>
+              </a:spcAft>
+            </a:pPr>
+            <a:r>
+              <a:rPr sz="1250" b="0">
+                <a:solidFill>
+                  <a:srgbClr val="3F4149"/>
+                </a:solidFill>
+                <a:latin typeface="Helvetica Neue"/>
+              </a:rPr>
+              <a:t>0,36 → 0,50</a:t>
+            </a:r>
+          </a:p>
+        </p:txBody>
+      </p:sp>
+      <p:sp>
+        <p:nvSpPr>
+          <p:cNvPr id="28" name="Rounded Rectangle 27"/>
           <p:cNvSpPr/>
           <p:nvPr/>
         </p:nvSpPr>
         <p:spPr>
           <a:xfrm>
-            <a:off x="1080100" y="2850000"/>
-            <a:ext cx="1300000" cy="300000"/>
+            <a:off x="680100" y="4400000"/>
+            <a:ext cx="5300000" cy="1350000"/>
           </a:xfrm>
           <a:prstGeom prst="roundRect">
             <a:avLst>
-              <a:gd name="adj" fmla="val 50000"/>
+              <a:gd name="adj" fmla="val 4000"/>
             </a:avLst>
           </a:prstGeom>
           <a:solidFill>
-            <a:srgbClr val="8A8D96"/>
+            <a:srgbClr val="FDF3F3"/>
           </a:solidFill>
           <a:ln>
             <a:noFill/>
@@ -5550,6 +6329,52 @@
           </a:fontRef>
         </p:style>
         <p:txBody>
+          <a:bodyPr rtlCol="0" anchor="ctr"/>
+          <a:lstStyle/>
+          <a:p>
+            <a:pPr algn="ctr"/>
+          </a:p>
+        </p:txBody>
+      </p:sp>
+      <p:sp>
+        <p:nvSpPr>
+          <p:cNvPr id="29" name="Rounded Rectangle 28"/>
+          <p:cNvSpPr/>
+          <p:nvPr/>
+        </p:nvSpPr>
+        <p:spPr>
+          <a:xfrm>
+            <a:off x="920100" y="4570000"/>
+            <a:ext cx="2700000" cy="310000"/>
+          </a:xfrm>
+          <a:prstGeom prst="roundRect">
+            <a:avLst>
+              <a:gd name="adj" fmla="val 50000"/>
+            </a:avLst>
+          </a:prstGeom>
+          <a:solidFill>
+            <a:srgbClr val="9E2B34"/>
+          </a:solidFill>
+          <a:ln>
+            <a:noFill/>
+          </a:ln>
+          <a:effectLst/>
+        </p:spPr>
+        <p:style>
+          <a:lnRef idx="1">
+            <a:schemeClr val="accent1"/>
+          </a:lnRef>
+          <a:fillRef idx="3">
+            <a:schemeClr val="accent1"/>
+          </a:fillRef>
+          <a:effectRef idx="2">
+            <a:schemeClr val="accent1"/>
+          </a:effectRef>
+          <a:fontRef idx="minor">
+            <a:schemeClr val="lt1"/>
+          </a:fontRef>
+        </p:style>
+        <p:txBody>
           <a:bodyPr rtlCol="0" anchor="ctr" wrap="none" lIns="0" rIns="0"/>
           <a:lstStyle/>
           <a:p>
@@ -5561,99 +6386,21 @@
                 </a:solidFill>
                 <a:latin typeface="Helvetica Neue"/>
               </a:rPr>
-              <a:t>ĐÃ THỬ</a:t>
-            </a:r>
-          </a:p>
-        </p:txBody>
-      </p:sp>
-      <p:sp>
-        <p:nvSpPr>
-          <p:cNvPr id="8" name="TextBox 7"/>
-          <p:cNvSpPr txBox="1"/>
-          <p:nvPr/>
-        </p:nvSpPr>
-        <p:spPr>
-          <a:xfrm>
-            <a:off x="1080100" y="3330000"/>
-            <a:ext cx="4600000" cy="400000"/>
-          </a:xfrm>
-          <a:prstGeom prst="rect">
-            <a:avLst/>
-          </a:prstGeom>
-          <a:noFill/>
-        </p:spPr>
-        <p:txBody>
-          <a:bodyPr wrap="square" lIns="0" rIns="0" tIns="0" bIns="0">
-            <a:spAutoFit/>
-          </a:bodyPr>
-          <a:lstStyle/>
-          <a:p>
-            <a:pPr algn="l">
-              <a:spcAft>
-                <a:spcPts val="600"/>
-              </a:spcAft>
-            </a:pPr>
-            <a:r>
-              <a:rPr sz="1700" b="1">
-                <a:solidFill>
-                  <a:srgbClr val="16161A"/>
-                </a:solidFill>
-                <a:latin typeface="Helvetica Neue"/>
-              </a:rPr>
-              <a:t>Lỗi \dfrac</a:t>
-            </a:r>
-          </a:p>
-        </p:txBody>
-      </p:sp>
-      <p:sp>
-        <p:nvSpPr>
-          <p:cNvPr id="9" name="TextBox 8"/>
-          <p:cNvSpPr txBox="1"/>
-          <p:nvPr/>
-        </p:nvSpPr>
-        <p:spPr>
-          <a:xfrm>
-            <a:off x="1080100" y="3800000"/>
-            <a:ext cx="4600000" cy="700000"/>
-          </a:xfrm>
-          <a:prstGeom prst="rect">
-            <a:avLst/>
-          </a:prstGeom>
-          <a:noFill/>
-        </p:spPr>
-        <p:txBody>
-          <a:bodyPr wrap="square" lIns="0" rIns="0" tIns="0" bIns="0">
-            <a:spAutoFit/>
-          </a:bodyPr>
-          <a:lstStyle/>
-          <a:p>
-            <a:pPr algn="l">
-              <a:spcAft>
-                <a:spcPts val="600"/>
-              </a:spcAft>
-            </a:pPr>
-            <a:r>
-              <a:rPr sz="4400" b="1">
-                <a:solidFill>
-                  <a:srgbClr val="8A8D96"/>
-                </a:solidFill>
-                <a:latin typeface="Georgia"/>
-              </a:rPr>
-              <a:t>0,55%</a:t>
-            </a:r>
-          </a:p>
-        </p:txBody>
-      </p:sp>
-      <p:sp>
-        <p:nvSpPr>
-          <p:cNvPr id="10" name="TextBox 9"/>
-          <p:cNvSpPr txBox="1"/>
-          <p:nvPr/>
-        </p:nvSpPr>
-        <p:spPr>
-          <a:xfrm>
-            <a:off x="1080100" y="4550000"/>
-            <a:ext cx="4600000" cy="550000"/>
+              <a:t>KHÔNG GIỎI LÊN</a:t>
+            </a:r>
+          </a:p>
+        </p:txBody>
+      </p:sp>
+      <p:sp>
+        <p:nvSpPr>
+          <p:cNvPr id="30" name="TextBox 29"/>
+          <p:cNvSpPr txBox="1"/>
+          <p:nvPr/>
+        </p:nvSpPr>
+        <p:spPr>
+          <a:xfrm>
+            <a:off x="920100" y="5030000"/>
+            <a:ext cx="4850000" cy="650000"/>
           </a:xfrm>
           <a:prstGeom prst="rect">
             <a:avLst/>
@@ -5681,7 +6428,7 @@
                 </a:solidFill>
                 <a:latin typeface="Helvetica Neue"/>
               </a:rPr>
-              <a:t>số bài bị gạch oan mỗi vòng</a:t>
+              <a:t>pass@1 giảm, pass@8 đứng yên. Số đề giải thêm</a:t>
             </a:r>
           </a:p>
           <a:p>
@@ -5700,21 +6447,21 @@
                 </a:solidFill>
                 <a:latin typeface="Helvetica Neue"/>
               </a:rPr>
-              <a:t>→ không thấy ảnh hưởng gì</a:t>
-            </a:r>
-          </a:p>
-        </p:txBody>
-      </p:sp>
-      <p:sp>
-        <p:nvSpPr>
-          <p:cNvPr id="11" name="Rounded Rectangle 10"/>
+              <a:t>được gần bằng số đề mất đi.</a:t>
+            </a:r>
+          </a:p>
+        </p:txBody>
+      </p:sp>
+      <p:sp>
+        <p:nvSpPr>
+          <p:cNvPr id="31" name="Rounded Rectangle 30"/>
           <p:cNvSpPr/>
           <p:nvPr/>
         </p:nvSpPr>
         <p:spPr>
           <a:xfrm>
-            <a:off x="6200100" y="2650000"/>
-            <a:ext cx="5190000" cy="2500000"/>
+            <a:off x="6150100" y="4400000"/>
+            <a:ext cx="5300000" cy="1350000"/>
           </a:xfrm>
           <a:prstGeom prst="roundRect">
             <a:avLst>
@@ -5753,14 +6500,14 @@
       </p:sp>
       <p:sp>
         <p:nvSpPr>
-          <p:cNvPr id="12" name="Rounded Rectangle 11"/>
+          <p:cNvPr id="32" name="Rounded Rectangle 31"/>
           <p:cNvSpPr/>
           <p:nvPr/>
         </p:nvSpPr>
         <p:spPr>
           <a:xfrm>
-            <a:off x="6480100" y="2850000"/>
-            <a:ext cx="1300000" cy="300000"/>
+            <a:off x="6390100" y="4570000"/>
+            <a:ext cx="2700000" cy="310000"/>
           </a:xfrm>
           <a:prstGeom prst="roundRect">
             <a:avLst>
@@ -5801,99 +6548,21 @@
                 </a:solidFill>
                 <a:latin typeface="Helvetica Neue"/>
               </a:rPr>
-              <a:t>SẮP THỬ</a:t>
-            </a:r>
-          </a:p>
-        </p:txBody>
-      </p:sp>
-      <p:sp>
-        <p:nvSpPr>
-          <p:cNvPr id="13" name="TextBox 12"/>
-          <p:cNvSpPr txBox="1"/>
-          <p:nvPr/>
-        </p:nvSpPr>
-        <p:spPr>
-          <a:xfrm>
-            <a:off x="6480100" y="3330000"/>
-            <a:ext cx="4600000" cy="400000"/>
-          </a:xfrm>
-          <a:prstGeom prst="rect">
-            <a:avLst/>
-          </a:prstGeom>
-          <a:noFill/>
-        </p:spPr>
-        <p:txBody>
-          <a:bodyPr wrap="square" lIns="0" rIns="0" tIns="0" bIns="0">
-            <a:spAutoFit/>
-          </a:bodyPr>
-          <a:lstStyle/>
-          <a:p>
-            <a:pPr algn="l">
-              <a:spcAft>
-                <a:spcPts val="600"/>
-              </a:spcAft>
-            </a:pPr>
-            <a:r>
-              <a:rPr sz="1700" b="1">
-                <a:solidFill>
-                  <a:srgbClr val="16161A"/>
-                </a:solidFill>
-                <a:latin typeface="Helvetica Neue"/>
-              </a:rPr>
-              <a:t>Lỗi \boxed</a:t>
-            </a:r>
-          </a:p>
-        </p:txBody>
-      </p:sp>
-      <p:sp>
-        <p:nvSpPr>
-          <p:cNvPr id="14" name="TextBox 13"/>
-          <p:cNvSpPr txBox="1"/>
-          <p:nvPr/>
-        </p:nvSpPr>
-        <p:spPr>
-          <a:xfrm>
-            <a:off x="6480100" y="3800000"/>
-            <a:ext cx="4600000" cy="700000"/>
-          </a:xfrm>
-          <a:prstGeom prst="rect">
-            <a:avLst/>
-          </a:prstGeom>
-          <a:noFill/>
-        </p:spPr>
-        <p:txBody>
-          <a:bodyPr wrap="square" lIns="0" rIns="0" tIns="0" bIns="0">
-            <a:spAutoFit/>
-          </a:bodyPr>
-          <a:lstStyle/>
-          <a:p>
-            <a:pPr algn="l">
-              <a:spcAft>
-                <a:spcPts val="600"/>
-              </a:spcAft>
-            </a:pPr>
-            <a:r>
-              <a:rPr sz="4400" b="1">
-                <a:solidFill>
-                  <a:srgbClr val="0173B2"/>
-                </a:solidFill>
-                <a:latin typeface="Georgia"/>
-              </a:rPr>
-              <a:t>4,4%</a:t>
-            </a:r>
-          </a:p>
-        </p:txBody>
-      </p:sp>
-      <p:sp>
-        <p:nvSpPr>
-          <p:cNvPr id="15" name="TextBox 14"/>
-          <p:cNvSpPr txBox="1"/>
-          <p:nvPr/>
-        </p:nvSpPr>
-        <p:spPr>
-          <a:xfrm>
-            <a:off x="6480100" y="4550000"/>
-            <a:ext cx="4600000" cy="550000"/>
+              <a:t>KHÔNG HỌC THEO MÁY CHẤM</a:t>
+            </a:r>
+          </a:p>
+        </p:txBody>
+      </p:sp>
+      <p:sp>
+        <p:nvSpPr>
+          <p:cNvPr id="33" name="TextBox 32"/>
+          <p:cNvSpPr txBox="1"/>
+          <p:nvPr/>
+        </p:nvSpPr>
+        <p:spPr>
+          <a:xfrm>
+            <a:off x="6390100" y="5030000"/>
+            <a:ext cx="4850000" cy="650000"/>
           </a:xfrm>
           <a:prstGeom prst="rect">
             <a:avLst/>
@@ -5921,7 +6590,7 @@
                 </a:solidFill>
                 <a:latin typeface="Helvetica Neue"/>
               </a:rPr>
-              <a:t>số bài bị gạch oan mỗi vòng</a:t>
+              <a:t>Vá máy chấm xong, kết quả y như cũ (slide 11). Cách</a:t>
             </a:r>
           </a:p>
           <a:p>
@@ -5940,68 +6609,46 @@
                 </a:solidFill>
                 <a:latin typeface="Helvetica Neue"/>
               </a:rPr>
-              <a:t>→ nhiều gấp 8 lần, liệu có hại?</a:t>
-            </a:r>
-          </a:p>
-        </p:txBody>
-      </p:sp>
-      <p:sp>
-        <p:nvSpPr>
-          <p:cNvPr id="16" name="TextBox 15"/>
-          <p:cNvSpPr txBox="1"/>
-          <p:nvPr/>
-        </p:nvSpPr>
-        <p:spPr>
-          <a:xfrm>
-            <a:off x="800100" y="5500000"/>
-            <a:ext cx="10591495" cy="500000"/>
-          </a:xfrm>
-          <a:prstGeom prst="rect">
-            <a:avLst/>
-          </a:prstGeom>
-          <a:noFill/>
-        </p:spPr>
-        <p:txBody>
-          <a:bodyPr wrap="square" lIns="0" rIns="0" tIns="0" bIns="0">
-            <a:spAutoFit/>
-          </a:bodyPr>
-          <a:lstStyle/>
-          <a:p>
-            <a:pPr algn="l">
-              <a:lnSpc>
-                <a:spcPct val="140000"/>
-              </a:lnSpc>
-              <a:spcAft>
-                <a:spcPts val="600"/>
-              </a:spcAft>
-            </a:pPr>
-            <a:r>
-              <a:rPr sz="1250" b="1">
-                <a:solidFill>
-                  <a:srgbClr val="16161A"/>
-                </a:solidFill>
-                <a:latin typeface="Helvetica Neue"/>
-              </a:rPr>
-              <a:t>Nếu lỗi phổ biến gây hại còn lỗi hiếm thì không, sẽ biết được ngưỡng: lỗi máy chấm xảy ra</a:t>
-            </a:r>
-          </a:p>
-          <a:p>
-            <a:pPr algn="l">
-              <a:lnSpc>
-                <a:spcPct val="140000"/>
-              </a:lnSpc>
-              <a:spcAft>
-                <a:spcPts val="600"/>
-              </a:spcAft>
-            </a:pPr>
-            <a:r>
-              <a:rPr sz="1250" b="1">
-                <a:solidFill>
-                  <a:srgbClr val="16161A"/>
-                </a:solidFill>
-                <a:latin typeface="Helvetica Neue"/>
-              </a:rPr>
-              <a:t>bao nhiêu thì bắt đầu đáng lo. Đây là con số người làm tự học có thể dùng ngay.</a:t>
+              <a:t>viết không dồn về một kiểu, đáp án còn đa dạng hơn.</a:t>
+            </a:r>
+          </a:p>
+        </p:txBody>
+      </p:sp>
+      <p:sp>
+        <p:nvSpPr>
+          <p:cNvPr id="34" name="TextBox 33"/>
+          <p:cNvSpPr txBox="1"/>
+          <p:nvPr/>
+        </p:nvSpPr>
+        <p:spPr>
+          <a:xfrm>
+            <a:off x="800100" y="5980000"/>
+            <a:ext cx="10591495" cy="300000"/>
+          </a:xfrm>
+          <a:prstGeom prst="rect">
+            <a:avLst/>
+          </a:prstGeom>
+          <a:noFill/>
+        </p:spPr>
+        <p:txBody>
+          <a:bodyPr wrap="square" lIns="0" rIns="0" tIns="0" bIns="0">
+            <a:spAutoFit/>
+          </a:bodyPr>
+          <a:lstStyle/>
+          <a:p>
+            <a:pPr algn="l">
+              <a:spcAft>
+                <a:spcPts val="600"/>
+              </a:spcAft>
+            </a:pPr>
+            <a:r>
+              <a:rPr sz="1100" b="0">
+                <a:solidFill>
+                  <a:srgbClr val="8A8D96"/>
+                </a:solidFill>
+                <a:latin typeface="Helvetica Neue"/>
+              </a:rPr>
+              <a:t>Số của các lần chạy đã sửa thiết kế (tách đề thi riêng). Cú tụt 12,7 điểm của GSM8K mới có một lần chạy.</a:t>
             </a:r>
           </a:p>
         </p:txBody>
@@ -6058,7 +6705,7 @@
                 </a:solidFill>
                 <a:latin typeface="Helvetica Neue"/>
               </a:rPr>
-              <a:t>LỖI THỨ HAI</a:t>
+              <a:t>HƯỚNG TIẾP THEO</a:t>
             </a:r>
           </a:p>
         </p:txBody>
@@ -6139,7 +6786,7 @@
                 </a:solidFill>
                 <a:latin typeface="Georgia"/>
               </a:rPr>
-              <a:t>Máy chấm đọc đáp án trong sách bị thiếu</a:t>
+              <a:t>Vì sao tự học không làm model giỏi lên?</a:t>
             </a:r>
           </a:p>
         </p:txBody>
@@ -6153,20 +6800,23 @@
         <p:spPr>
           <a:xfrm>
             <a:off x="800100" y="1600000"/>
-            <a:ext cx="10591495" cy="400000"/>
-          </a:xfrm>
-          <a:prstGeom prst="rect">
-            <a:avLst/>
-          </a:prstGeom>
-          <a:noFill/>
-        </p:spPr>
-        <p:txBody>
-          <a:bodyPr wrap="square" lIns="0" rIns="0" tIns="0" bIns="0">
-            <a:spAutoFit/>
-          </a:bodyPr>
-          <a:lstStyle/>
-          <a:p>
-            <a:pPr algn="l">
+            <a:ext cx="10591495" cy="600000"/>
+          </a:xfrm>
+          <a:prstGeom prst="rect">
+            <a:avLst/>
+          </a:prstGeom>
+          <a:noFill/>
+        </p:spPr>
+        <p:txBody>
+          <a:bodyPr wrap="square" lIns="0" rIns="0" tIns="0" bIns="0">
+            <a:spAutoFit/>
+          </a:bodyPr>
+          <a:lstStyle/>
+          <a:p>
+            <a:pPr algn="l">
+              <a:lnSpc>
+                <a:spcPct val="145000"/>
+              </a:lnSpc>
               <a:spcAft>
                 <a:spcPts val="600"/>
               </a:spcAft>
@@ -6178,7 +6828,26 @@
                 </a:solidFill>
                 <a:latin typeface="Helvetica Neue"/>
               </a:rPr>
-              <a:t>Ví dụ một bài có đáp án là 3√13. Model làm đúng, nhưng vẫn bị gạch:</a:t>
+              <a:t>Tên phương pháp có ba ý: model “tự” học, qua bước “chấm”, để “giỏi lên”. Mỗi thí nghiệm dưới</a:t>
+            </a:r>
+          </a:p>
+          <a:p>
+            <a:pPr algn="l">
+              <a:lnSpc>
+                <a:spcPct val="145000"/>
+              </a:lnSpc>
+              <a:spcAft>
+                <a:spcPts val="600"/>
+              </a:spcAft>
+            </a:pPr>
+            <a:r>
+              <a:rPr sz="1350" b="0">
+                <a:solidFill>
+                  <a:srgbClr val="3F4149"/>
+                </a:solidFill>
+                <a:latin typeface="Helvetica Neue"/>
+              </a:rPr>
+              <a:t>đây kiểm tra một ý. Cả ba đã code xong, đang chờ GPU.</a:t>
             </a:r>
           </a:p>
         </p:txBody>
@@ -6191,8 +6860,8 @@
         </p:nvSpPr>
         <p:spPr>
           <a:xfrm>
-            <a:off x="680100" y="2150000"/>
-            <a:ext cx="10831495" cy="1150000"/>
+            <a:off x="800100" y="2550000"/>
+            <a:ext cx="3300000" cy="2950000"/>
           </a:xfrm>
           <a:prstGeom prst="roundRect">
             <a:avLst>
@@ -6200,7 +6869,7 @@
             </a:avLst>
           </a:prstGeom>
           <a:solidFill>
-            <a:srgbClr val="FDF3F3"/>
+            <a:srgbClr val="F5F5F7"/>
           </a:solidFill>
           <a:ln>
             <a:noFill/>
@@ -6231,139 +6900,22 @@
       </p:sp>
       <p:sp>
         <p:nvSpPr>
-          <p:cNvPr id="7" name="TextBox 6"/>
-          <p:cNvSpPr txBox="1"/>
-          <p:nvPr/>
-        </p:nvSpPr>
-        <p:spPr>
-          <a:xfrm>
-            <a:off x="920100" y="2300000"/>
-            <a:ext cx="10351495" cy="300000"/>
-          </a:xfrm>
-          <a:prstGeom prst="rect">
-            <a:avLst/>
-          </a:prstGeom>
-          <a:noFill/>
-        </p:spPr>
-        <p:txBody>
-          <a:bodyPr wrap="square" lIns="0" rIns="0" tIns="0" bIns="0">
-            <a:spAutoFit/>
-          </a:bodyPr>
-          <a:lstStyle/>
-          <a:p>
-            <a:pPr algn="l">
-              <a:spcAft>
-                <a:spcPts val="600"/>
-              </a:spcAft>
-            </a:pPr>
-            <a:r>
-              <a:rPr sz="1150" b="1">
-                <a:solidFill>
-                  <a:srgbClr val="B85C00"/>
-                </a:solidFill>
-                <a:latin typeface="Helvetica Neue"/>
-              </a:rPr>
-              <a:t>ĐÁP ÁN TRONG SÁCH (lưu dạng trần)</a:t>
-            </a:r>
-          </a:p>
-        </p:txBody>
-      </p:sp>
-      <p:sp>
-        <p:nvSpPr>
-          <p:cNvPr id="8" name="TextBox 7"/>
-          <p:cNvSpPr txBox="1"/>
-          <p:nvPr/>
-        </p:nvSpPr>
-        <p:spPr>
-          <a:xfrm>
-            <a:off x="920100" y="2650000"/>
-            <a:ext cx="4600000" cy="500000"/>
-          </a:xfrm>
-          <a:prstGeom prst="rect">
-            <a:avLst/>
-          </a:prstGeom>
-          <a:noFill/>
-        </p:spPr>
-        <p:txBody>
-          <a:bodyPr wrap="square" lIns="0" rIns="0" tIns="0" bIns="0">
-            <a:spAutoFit/>
-          </a:bodyPr>
-          <a:lstStyle/>
-          <a:p>
-            <a:pPr algn="l">
-              <a:spcAft>
-                <a:spcPts val="600"/>
-              </a:spcAft>
-            </a:pPr>
-            <a:r>
-              <a:rPr sz="1900" b="0">
-                <a:solidFill>
-                  <a:srgbClr val="16161A"/>
-                </a:solidFill>
-                <a:latin typeface="Helvetica Neue"/>
-              </a:rPr>
-              <a:t>3\sqrt{13}</a:t>
-            </a:r>
-          </a:p>
-        </p:txBody>
-      </p:sp>
-      <p:sp>
-        <p:nvSpPr>
-          <p:cNvPr id="9" name="TextBox 8"/>
-          <p:cNvSpPr txBox="1"/>
-          <p:nvPr/>
-        </p:nvSpPr>
-        <p:spPr>
-          <a:xfrm>
-            <a:off x="5900100" y="2650000"/>
-            <a:ext cx="5200000" cy="500000"/>
-          </a:xfrm>
-          <a:prstGeom prst="rect">
-            <a:avLst/>
-          </a:prstGeom>
-          <a:noFill/>
-        </p:spPr>
-        <p:txBody>
-          <a:bodyPr wrap="square" lIns="0" rIns="0" tIns="0" bIns="0">
-            <a:spAutoFit/>
-          </a:bodyPr>
-          <a:lstStyle/>
-          <a:p>
-            <a:pPr algn="l">
-              <a:spcAft>
-                <a:spcPts val="600"/>
-              </a:spcAft>
-            </a:pPr>
-            <a:r>
-              <a:rPr sz="1700" b="1">
-                <a:solidFill>
-                  <a:srgbClr val="B85C00"/>
-                </a:solidFill>
-                <a:latin typeface="Helvetica Neue"/>
-              </a:rPr>
-              <a:t>máy đọc được:  3</a:t>
-            </a:r>
-          </a:p>
-        </p:txBody>
-      </p:sp>
-      <p:sp>
-        <p:nvSpPr>
-          <p:cNvPr id="10" name="Rounded Rectangle 9"/>
+          <p:cNvPr id="7" name="Rounded Rectangle 6"/>
           <p:cNvSpPr/>
           <p:nvPr/>
         </p:nvSpPr>
         <p:spPr>
           <a:xfrm>
-            <a:off x="680100" y="3450000"/>
-            <a:ext cx="10831495" cy="1150000"/>
+            <a:off x="1040100" y="2730000"/>
+            <a:ext cx="1500000" cy="300000"/>
           </a:xfrm>
           <a:prstGeom prst="roundRect">
             <a:avLst>
-              <a:gd name="adj" fmla="val 4000"/>
+              <a:gd name="adj" fmla="val 50000"/>
             </a:avLst>
           </a:prstGeom>
           <a:solidFill>
-            <a:srgbClr val="EDF7F2"/>
+            <a:srgbClr val="9E2B34"/>
           </a:solidFill>
           <a:ln>
             <a:noFill/>
@@ -6385,13 +6937,176 @@
           </a:fontRef>
         </p:style>
         <p:txBody>
-          <a:bodyPr rtlCol="0" anchor="ctr"/>
+          <a:bodyPr rtlCol="0" anchor="ctr" wrap="none" lIns="0" rIns="0"/>
           <a:lstStyle/>
           <a:p>
             <a:pPr algn="ctr"/>
-          </a:p>
-        </p:txBody>
-      </p:sp>
+            <a:r>
+              <a:rPr sz="1050" b="1">
+                <a:solidFill>
+                  <a:srgbClr val="FFFFFF"/>
+                </a:solidFill>
+                <a:latin typeface="Helvetica Neue"/>
+              </a:rPr>
+              <a:t>GIỎI LÊN</a:t>
+            </a:r>
+          </a:p>
+        </p:txBody>
+      </p:sp>
+      <p:sp>
+        <p:nvSpPr>
+          <p:cNvPr id="8" name="TextBox 7"/>
+          <p:cNvSpPr txBox="1"/>
+          <p:nvPr/>
+        </p:nvSpPr>
+        <p:spPr>
+          <a:xfrm>
+            <a:off x="1040100" y="3220000"/>
+            <a:ext cx="2900000" cy="400000"/>
+          </a:xfrm>
+          <a:prstGeom prst="rect">
+            <a:avLst/>
+          </a:prstGeom>
+          <a:noFill/>
+        </p:spPr>
+        <p:txBody>
+          <a:bodyPr wrap="square" lIns="0" rIns="0" tIns="0" bIns="0">
+            <a:spAutoFit/>
+          </a:bodyPr>
+          <a:lstStyle/>
+          <a:p>
+            <a:pPr algn="l">
+              <a:spcAft>
+                <a:spcPts val="600"/>
+              </a:spcAft>
+            </a:pPr>
+            <a:r>
+              <a:rPr sz="1450" b="1">
+                <a:solidFill>
+                  <a:srgbClr val="16161A"/>
+                </a:solidFill>
+                <a:latin typeface="Helvetica Neue"/>
+              </a:rPr>
+              <a:t>Chạy lại GSM8K lần hai</a:t>
+            </a:r>
+          </a:p>
+        </p:txBody>
+      </p:sp>
+      <p:sp>
+        <p:nvSpPr>
+          <p:cNvPr id="9" name="TextBox 8"/>
+          <p:cNvSpPr txBox="1"/>
+          <p:nvPr/>
+        </p:nvSpPr>
+        <p:spPr>
+          <a:xfrm>
+            <a:off x="1040100" y="3700000"/>
+            <a:ext cx="2900000" cy="900000"/>
+          </a:xfrm>
+          <a:prstGeom prst="rect">
+            <a:avLst/>
+          </a:prstGeom>
+          <a:noFill/>
+        </p:spPr>
+        <p:txBody>
+          <a:bodyPr wrap="square" lIns="0" rIns="0" tIns="0" bIns="0">
+            <a:spAutoFit/>
+          </a:bodyPr>
+          <a:lstStyle/>
+          <a:p>
+            <a:pPr algn="l">
+              <a:lnSpc>
+                <a:spcPct val="130000"/>
+              </a:lnSpc>
+              <a:spcAft>
+                <a:spcPts val="600"/>
+              </a:spcAft>
+            </a:pPr>
+            <a:r>
+              <a:rPr sz="1200" b="0">
+                <a:solidFill>
+                  <a:srgbClr val="3F4149"/>
+                </a:solidFill>
+                <a:latin typeface="Helvetica Neue"/>
+              </a:rPr>
+              <a:t>Cú tụt 12,7 điểm mới thấy ở</a:t>
+            </a:r>
+          </a:p>
+          <a:p>
+            <a:pPr algn="l">
+              <a:lnSpc>
+                <a:spcPct val="130000"/>
+              </a:lnSpc>
+              <a:spcAft>
+                <a:spcPts val="600"/>
+              </a:spcAft>
+            </a:pPr>
+            <a:r>
+              <a:rPr sz="1200" b="0">
+                <a:solidFill>
+                  <a:srgbClr val="3F4149"/>
+                </a:solidFill>
+                <a:latin typeface="Helvetica Neue"/>
+              </a:rPr>
+              <a:t>một lần chạy. Chạy lại với</a:t>
+            </a:r>
+          </a:p>
+          <a:p>
+            <a:pPr algn="l">
+              <a:lnSpc>
+                <a:spcPct val="130000"/>
+              </a:lnSpc>
+              <a:spcAft>
+                <a:spcPts val="600"/>
+              </a:spcAft>
+            </a:pPr>
+            <a:r>
+              <a:rPr sz="1200" b="0">
+                <a:solidFill>
+                  <a:srgbClr val="3F4149"/>
+                </a:solidFill>
+                <a:latin typeface="Helvetica Neue"/>
+              </a:rPr>
+              <a:t>seed khác.</a:t>
+            </a:r>
+          </a:p>
+        </p:txBody>
+      </p:sp>
+      <p:cxnSp>
+        <p:nvCxnSpPr>
+          <p:cNvPr id="10" name="Connector 9"/>
+          <p:cNvCxnSpPr/>
+          <p:nvPr/>
+        </p:nvCxnSpPr>
+        <p:spPr>
+          <a:xfrm>
+            <a:off x="1040100" y="4620000"/>
+            <a:ext cx="2820000" cy="0"/>
+          </a:xfrm>
+          <a:prstGeom prst="line">
+            <a:avLst/>
+          </a:prstGeom>
+          <a:ln w="9525">
+            <a:solidFill>
+              <a:srgbClr val="DDDDE2"/>
+            </a:solidFill>
+          </a:ln>
+        </p:spPr>
+        <p:style>
+          <a:lnRef idx="2">
+            <a:schemeClr val="accent1"/>
+          </a:lnRef>
+          <a:fillRef idx="0">
+            <a:schemeClr val="accent1"/>
+          </a:fillRef>
+          <a:effectRef idx="1">
+            <a:schemeClr val="accent1"/>
+          </a:effectRef>
+          <a:fontRef idx="minor">
+            <a:schemeClr val="tx1"/>
+          </a:fontRef>
+        </p:style>
+      </p:cxnSp>
       <p:sp>
         <p:nvSpPr>
           <p:cNvPr id="11" name="TextBox 10"/>
@@ -6400,125 +7115,8 @@
         </p:nvSpPr>
         <p:spPr>
           <a:xfrm>
-            <a:off x="920100" y="3600000"/>
-            <a:ext cx="10351495" cy="300000"/>
-          </a:xfrm>
-          <a:prstGeom prst="rect">
-            <a:avLst/>
-          </a:prstGeom>
-          <a:noFill/>
-        </p:spPr>
-        <p:txBody>
-          <a:bodyPr wrap="square" lIns="0" rIns="0" tIns="0" bIns="0">
-            <a:spAutoFit/>
-          </a:bodyPr>
-          <a:lstStyle/>
-          <a:p>
-            <a:pPr algn="l">
-              <a:spcAft>
-                <a:spcPts val="600"/>
-              </a:spcAft>
-            </a:pPr>
-            <a:r>
-              <a:rPr sz="1150" b="1">
-                <a:solidFill>
-                  <a:srgbClr val="029E73"/>
-                </a:solidFill>
-                <a:latin typeface="Helvetica Neue"/>
-              </a:rPr>
-              <a:t>BÀI MODEL LÀM (có \boxed theo yêu cầu đề)</a:t>
-            </a:r>
-          </a:p>
-        </p:txBody>
-      </p:sp>
-      <p:sp>
-        <p:nvSpPr>
-          <p:cNvPr id="12" name="TextBox 11"/>
-          <p:cNvSpPr txBox="1"/>
-          <p:nvPr/>
-        </p:nvSpPr>
-        <p:spPr>
-          <a:xfrm>
-            <a:off x="920100" y="3950000"/>
-            <a:ext cx="4600000" cy="500000"/>
-          </a:xfrm>
-          <a:prstGeom prst="rect">
-            <a:avLst/>
-          </a:prstGeom>
-          <a:noFill/>
-        </p:spPr>
-        <p:txBody>
-          <a:bodyPr wrap="square" lIns="0" rIns="0" tIns="0" bIns="0">
-            <a:spAutoFit/>
-          </a:bodyPr>
-          <a:lstStyle/>
-          <a:p>
-            <a:pPr algn="l">
-              <a:spcAft>
-                <a:spcPts val="600"/>
-              </a:spcAft>
-            </a:pPr>
-            <a:r>
-              <a:rPr sz="1900" b="0">
-                <a:solidFill>
-                  <a:srgbClr val="16161A"/>
-                </a:solidFill>
-                <a:latin typeface="Helvetica Neue"/>
-              </a:rPr>
-              <a:t>\boxed{3\sqrt{13}}</a:t>
-            </a:r>
-          </a:p>
-        </p:txBody>
-      </p:sp>
-      <p:sp>
-        <p:nvSpPr>
-          <p:cNvPr id="13" name="TextBox 12"/>
-          <p:cNvSpPr txBox="1"/>
-          <p:nvPr/>
-        </p:nvSpPr>
-        <p:spPr>
-          <a:xfrm>
-            <a:off x="5900100" y="3950000"/>
-            <a:ext cx="5200000" cy="500000"/>
-          </a:xfrm>
-          <a:prstGeom prst="rect">
-            <a:avLst/>
-          </a:prstGeom>
-          <a:noFill/>
-        </p:spPr>
-        <p:txBody>
-          <a:bodyPr wrap="square" lIns="0" rIns="0" tIns="0" bIns="0">
-            <a:spAutoFit/>
-          </a:bodyPr>
-          <a:lstStyle/>
-          <a:p>
-            <a:pPr algn="l">
-              <a:spcAft>
-                <a:spcPts val="600"/>
-              </a:spcAft>
-            </a:pPr>
-            <a:r>
-              <a:rPr sz="1700" b="1">
-                <a:solidFill>
-                  <a:srgbClr val="029E73"/>
-                </a:solidFill>
-                <a:latin typeface="Helvetica Neue"/>
-              </a:rPr>
-              <a:t>máy đọc được:  3√13</a:t>
-            </a:r>
-          </a:p>
-        </p:txBody>
-      </p:sp>
-      <p:sp>
-        <p:nvSpPr>
-          <p:cNvPr id="14" name="TextBox 13"/>
-          <p:cNvSpPr txBox="1"/>
-          <p:nvPr/>
-        </p:nvSpPr>
-        <p:spPr>
-          <a:xfrm>
-            <a:off x="800100" y="4900000"/>
-            <a:ext cx="10591495" cy="700000"/>
+            <a:off x="1040100" y="4750000"/>
+            <a:ext cx="2900000" cy="650000"/>
           </a:xfrm>
           <a:prstGeom prst="rect">
             <a:avLst/>
@@ -6533,53 +7131,53 @@
           <a:p>
             <a:pPr algn="l">
               <a:lnSpc>
-                <a:spcPct val="145000"/>
+                <a:spcPct val="130000"/>
               </a:lnSpc>
               <a:spcAft>
                 <a:spcPts val="600"/>
               </a:spcAft>
             </a:pPr>
             <a:r>
-              <a:rPr sz="1300" b="0">
-                <a:solidFill>
-                  <a:srgbClr val="3F4149"/>
-                </a:solidFill>
-                <a:latin typeface="Helvetica Neue"/>
-              </a:rPr>
-              <a:t>Máy chấm chỉ đọc đầy đủ khi đáp án nằm trong \boxed. Đáp án trong sách không có \boxed nên bị</a:t>
+              <a:rPr sz="1200" b="1">
+                <a:solidFill>
+                  <a:srgbClr val="9E2B34"/>
+                </a:solidFill>
+                <a:latin typeface="Helvetica Neue"/>
+              </a:rPr>
+              <a:t>Nếu tụt lại: tự học làm</a:t>
             </a:r>
           </a:p>
           <a:p>
             <a:pPr algn="l">
               <a:lnSpc>
-                <a:spcPct val="145000"/>
+                <a:spcPct val="130000"/>
               </a:lnSpc>
               <a:spcAft>
                 <a:spcPts val="600"/>
               </a:spcAft>
             </a:pPr>
             <a:r>
-              <a:rPr sz="1300" b="0">
-                <a:solidFill>
-                  <a:srgbClr val="3F4149"/>
-                </a:solidFill>
-                <a:latin typeface="Helvetica Neue"/>
-              </a:rPr>
-              <a:t>đọc thiếu, thành ra "3" khác "3√13". Lỗi này gặp ở 8,5% số đề MATH-500.</a:t>
-            </a:r>
-          </a:p>
-        </p:txBody>
-      </p:sp>
-      <p:sp>
-        <p:nvSpPr>
-          <p:cNvPr id="15" name="Rounded Rectangle 14"/>
+              <a:rPr sz="1200" b="1">
+                <a:solidFill>
+                  <a:srgbClr val="9E2B34"/>
+                </a:solidFill>
+                <a:latin typeface="Helvetica Neue"/>
+              </a:rPr>
+              <a:t>model dở đi thật.</a:t>
+            </a:r>
+          </a:p>
+        </p:txBody>
+      </p:sp>
+      <p:sp>
+        <p:nvSpPr>
+          <p:cNvPr id="12" name="Rounded Rectangle 11"/>
           <p:cNvSpPr/>
           <p:nvPr/>
         </p:nvSpPr>
         <p:spPr>
           <a:xfrm>
-            <a:off x="680100" y="5850000"/>
-            <a:ext cx="10831495" cy="520000"/>
+            <a:off x="4360100" y="2550000"/>
+            <a:ext cx="3300000" cy="2950000"/>
           </a:xfrm>
           <a:prstGeom prst="roundRect">
             <a:avLst>
@@ -6587,7 +7185,7 @@
             </a:avLst>
           </a:prstGeom>
           <a:solidFill>
-            <a:srgbClr val="F0F6FA"/>
+            <a:srgbClr val="F5F5F7"/>
           </a:solidFill>
           <a:ln>
             <a:noFill/>
@@ -6618,27 +7216,220 @@
       </p:sp>
       <p:sp>
         <p:nvSpPr>
-          <p:cNvPr id="16" name="TextBox 15"/>
-          <p:cNvSpPr txBox="1"/>
-          <p:nvPr/>
-        </p:nvSpPr>
-        <p:spPr>
-          <a:xfrm>
-            <a:off x="920100" y="5980000"/>
-            <a:ext cx="10351495" cy="300000"/>
-          </a:xfrm>
-          <a:prstGeom prst="rect">
-            <a:avLst/>
-          </a:prstGeom>
-          <a:noFill/>
-        </p:spPr>
-        <p:txBody>
-          <a:bodyPr wrap="square" lIns="0" rIns="0" tIns="0" bIns="0">
-            <a:spAutoFit/>
-          </a:bodyPr>
-          <a:lstStyle/>
-          <a:p>
-            <a:pPr algn="l">
+          <p:cNvPr id="13" name="Rounded Rectangle 12"/>
+          <p:cNvSpPr/>
+          <p:nvPr/>
+        </p:nvSpPr>
+        <p:spPr>
+          <a:xfrm>
+            <a:off x="4600100" y="2730000"/>
+            <a:ext cx="1500000" cy="300000"/>
+          </a:xfrm>
+          <a:prstGeom prst="roundRect">
+            <a:avLst>
+              <a:gd name="adj" fmla="val 50000"/>
+            </a:avLst>
+          </a:prstGeom>
+          <a:solidFill>
+            <a:srgbClr val="0173B2"/>
+          </a:solidFill>
+          <a:ln>
+            <a:noFill/>
+          </a:ln>
+          <a:effectLst/>
+        </p:spPr>
+        <p:style>
+          <a:lnRef idx="1">
+            <a:schemeClr val="accent1"/>
+          </a:lnRef>
+          <a:fillRef idx="3">
+            <a:schemeClr val="accent1"/>
+          </a:fillRef>
+          <a:effectRef idx="2">
+            <a:schemeClr val="accent1"/>
+          </a:effectRef>
+          <a:fontRef idx="minor">
+            <a:schemeClr val="lt1"/>
+          </a:fontRef>
+        </p:style>
+        <p:txBody>
+          <a:bodyPr rtlCol="0" anchor="ctr" wrap="none" lIns="0" rIns="0"/>
+          <a:lstStyle/>
+          <a:p>
+            <a:pPr algn="ctr"/>
+            <a:r>
+              <a:rPr sz="1050" b="1">
+                <a:solidFill>
+                  <a:srgbClr val="FFFFFF"/>
+                </a:solidFill>
+                <a:latin typeface="Helvetica Neue"/>
+              </a:rPr>
+              <a:t>BƯỚC CHẤM</a:t>
+            </a:r>
+          </a:p>
+        </p:txBody>
+      </p:sp>
+      <p:sp>
+        <p:nvSpPr>
+          <p:cNvPr id="14" name="TextBox 13"/>
+          <p:cNvSpPr txBox="1"/>
+          <p:nvPr/>
+        </p:nvSpPr>
+        <p:spPr>
+          <a:xfrm>
+            <a:off x="4600100" y="3220000"/>
+            <a:ext cx="2900000" cy="400000"/>
+          </a:xfrm>
+          <a:prstGeom prst="rect">
+            <a:avLst/>
+          </a:prstGeom>
+          <a:noFill/>
+        </p:spPr>
+        <p:txBody>
+          <a:bodyPr wrap="square" lIns="0" rIns="0" tIns="0" bIns="0">
+            <a:spAutoFit/>
+          </a:bodyPr>
+          <a:lstStyle/>
+          <a:p>
+            <a:pPr algn="l">
+              <a:spcAft>
+                <a:spcPts val="600"/>
+              </a:spcAft>
+            </a:pPr>
+            <a:r>
+              <a:rPr sz="1450" b="1">
+                <a:solidFill>
+                  <a:srgbClr val="16161A"/>
+                </a:solidFill>
+                <a:latin typeface="Helvetica Neue"/>
+              </a:rPr>
+              <a:t>Bỏ bước lọc</a:t>
+            </a:r>
+          </a:p>
+        </p:txBody>
+      </p:sp>
+      <p:sp>
+        <p:nvSpPr>
+          <p:cNvPr id="15" name="TextBox 14"/>
+          <p:cNvSpPr txBox="1"/>
+          <p:nvPr/>
+        </p:nvSpPr>
+        <p:spPr>
+          <a:xfrm>
+            <a:off x="4600100" y="3700000"/>
+            <a:ext cx="2900000" cy="900000"/>
+          </a:xfrm>
+          <a:prstGeom prst="rect">
+            <a:avLst/>
+          </a:prstGeom>
+          <a:noFill/>
+        </p:spPr>
+        <p:txBody>
+          <a:bodyPr wrap="square" lIns="0" rIns="0" tIns="0" bIns="0">
+            <a:spAutoFit/>
+          </a:bodyPr>
+          <a:lstStyle/>
+          <a:p>
+            <a:pPr algn="l">
+              <a:lnSpc>
+                <a:spcPct val="130000"/>
+              </a:lnSpc>
+              <a:spcAft>
+                <a:spcPts val="600"/>
+              </a:spcAft>
+            </a:pPr>
+            <a:r>
+              <a:rPr sz="1200" b="0">
+                <a:solidFill>
+                  <a:srgbClr val="3F4149"/>
+                </a:solidFill>
+                <a:latin typeface="Helvetica Neue"/>
+              </a:rPr>
+              <a:t>Dạy lại bằng cả 8 bài model</a:t>
+            </a:r>
+          </a:p>
+          <a:p>
+            <a:pPr algn="l">
+              <a:lnSpc>
+                <a:spcPct val="130000"/>
+              </a:lnSpc>
+              <a:spcAft>
+                <a:spcPts val="600"/>
+              </a:spcAft>
+            </a:pPr>
+            <a:r>
+              <a:rPr sz="1200" b="0">
+                <a:solidFill>
+                  <a:srgbClr val="3F4149"/>
+                </a:solidFill>
+                <a:latin typeface="Helvetica Neue"/>
+              </a:rPr>
+              <a:t>làm, không qua máy chấm.</a:t>
+            </a:r>
+          </a:p>
+        </p:txBody>
+      </p:sp>
+      <p:cxnSp>
+        <p:nvCxnSpPr>
+          <p:cNvPr id="16" name="Connector 15"/>
+          <p:cNvCxnSpPr/>
+          <p:nvPr/>
+        </p:nvCxnSpPr>
+        <p:spPr>
+          <a:xfrm>
+            <a:off x="4600100" y="4620000"/>
+            <a:ext cx="2820000" cy="0"/>
+          </a:xfrm>
+          <a:prstGeom prst="line">
+            <a:avLst/>
+          </a:prstGeom>
+          <a:ln w="9525">
+            <a:solidFill>
+              <a:srgbClr val="DDDDE2"/>
+            </a:solidFill>
+          </a:ln>
+        </p:spPr>
+        <p:style>
+          <a:lnRef idx="2">
+            <a:schemeClr val="accent1"/>
+          </a:lnRef>
+          <a:fillRef idx="0">
+            <a:schemeClr val="accent1"/>
+          </a:fillRef>
+          <a:effectRef idx="1">
+            <a:schemeClr val="accent1"/>
+          </a:effectRef>
+          <a:fontRef idx="minor">
+            <a:schemeClr val="tx1"/>
+          </a:fontRef>
+        </p:style>
+      </p:cxnSp>
+      <p:sp>
+        <p:nvSpPr>
+          <p:cNvPr id="17" name="TextBox 16"/>
+          <p:cNvSpPr txBox="1"/>
+          <p:nvPr/>
+        </p:nvSpPr>
+        <p:spPr>
+          <a:xfrm>
+            <a:off x="4600100" y="4750000"/>
+            <a:ext cx="2900000" cy="650000"/>
+          </a:xfrm>
+          <a:prstGeom prst="rect">
+            <a:avLst/>
+          </a:prstGeom>
+          <a:noFill/>
+        </p:spPr>
+        <p:txBody>
+          <a:bodyPr wrap="square" lIns="0" rIns="0" tIns="0" bIns="0">
+            <a:spAutoFit/>
+          </a:bodyPr>
+          <a:lstStyle/>
+          <a:p>
+            <a:pPr algn="l">
+              <a:lnSpc>
+                <a:spcPct val="130000"/>
+              </a:lnSpc>
               <a:spcAft>
                 <a:spcPts val="600"/>
               </a:spcAft>
@@ -6650,7 +7441,384 @@
                 </a:solidFill>
                 <a:latin typeface="Helvetica Neue"/>
               </a:rPr>
-              <a:t>Đã sửa: bọc đáp án trong sách vào \boxed trước khi chấm. Đã kiểm tra, không làm hỏng chỗ khác.</a:t>
+              <a:t>Nếu điểm như cũ: bước</a:t>
+            </a:r>
+          </a:p>
+          <a:p>
+            <a:pPr algn="l">
+              <a:lnSpc>
+                <a:spcPct val="130000"/>
+              </a:lnSpc>
+              <a:spcAft>
+                <a:spcPts val="600"/>
+              </a:spcAft>
+            </a:pPr>
+            <a:r>
+              <a:rPr sz="1200" b="1">
+                <a:solidFill>
+                  <a:srgbClr val="0173B2"/>
+                </a:solidFill>
+                <a:latin typeface="Helvetica Neue"/>
+              </a:rPr>
+              <a:t>chấm không đóng góp gì.</a:t>
+            </a:r>
+          </a:p>
+        </p:txBody>
+      </p:sp>
+      <p:sp>
+        <p:nvSpPr>
+          <p:cNvPr id="18" name="Rounded Rectangle 17"/>
+          <p:cNvSpPr/>
+          <p:nvPr/>
+        </p:nvSpPr>
+        <p:spPr>
+          <a:xfrm>
+            <a:off x="7920100" y="2550000"/>
+            <a:ext cx="3300000" cy="2950000"/>
+          </a:xfrm>
+          <a:prstGeom prst="roundRect">
+            <a:avLst>
+              <a:gd name="adj" fmla="val 4000"/>
+            </a:avLst>
+          </a:prstGeom>
+          <a:solidFill>
+            <a:srgbClr val="F5F5F7"/>
+          </a:solidFill>
+          <a:ln>
+            <a:noFill/>
+          </a:ln>
+          <a:effectLst/>
+        </p:spPr>
+        <p:style>
+          <a:lnRef idx="1">
+            <a:schemeClr val="accent1"/>
+          </a:lnRef>
+          <a:fillRef idx="3">
+            <a:schemeClr val="accent1"/>
+          </a:fillRef>
+          <a:effectRef idx="2">
+            <a:schemeClr val="accent1"/>
+          </a:effectRef>
+          <a:fontRef idx="minor">
+            <a:schemeClr val="lt1"/>
+          </a:fontRef>
+        </p:style>
+        <p:txBody>
+          <a:bodyPr rtlCol="0" anchor="ctr"/>
+          <a:lstStyle/>
+          <a:p>
+            <a:pPr algn="ctr"/>
+          </a:p>
+        </p:txBody>
+      </p:sp>
+      <p:sp>
+        <p:nvSpPr>
+          <p:cNvPr id="19" name="Rounded Rectangle 18"/>
+          <p:cNvSpPr/>
+          <p:nvPr/>
+        </p:nvSpPr>
+        <p:spPr>
+          <a:xfrm>
+            <a:off x="8160100" y="2730000"/>
+            <a:ext cx="1500000" cy="300000"/>
+          </a:xfrm>
+          <a:prstGeom prst="roundRect">
+            <a:avLst>
+              <a:gd name="adj" fmla="val 50000"/>
+            </a:avLst>
+          </a:prstGeom>
+          <a:solidFill>
+            <a:srgbClr val="029E73"/>
+          </a:solidFill>
+          <a:ln>
+            <a:noFill/>
+          </a:ln>
+          <a:effectLst/>
+        </p:spPr>
+        <p:style>
+          <a:lnRef idx="1">
+            <a:schemeClr val="accent1"/>
+          </a:lnRef>
+          <a:fillRef idx="3">
+            <a:schemeClr val="accent1"/>
+          </a:fillRef>
+          <a:effectRef idx="2">
+            <a:schemeClr val="accent1"/>
+          </a:effectRef>
+          <a:fontRef idx="minor">
+            <a:schemeClr val="lt1"/>
+          </a:fontRef>
+        </p:style>
+        <p:txBody>
+          <a:bodyPr rtlCol="0" anchor="ctr" wrap="none" lIns="0" rIns="0"/>
+          <a:lstStyle/>
+          <a:p>
+            <a:pPr algn="ctr"/>
+            <a:r>
+              <a:rPr sz="1050" b="1">
+                <a:solidFill>
+                  <a:srgbClr val="FFFFFF"/>
+                </a:solidFill>
+                <a:latin typeface="Helvetica Neue"/>
+              </a:rPr>
+              <a:t>TỰ HỌC</a:t>
+            </a:r>
+          </a:p>
+        </p:txBody>
+      </p:sp>
+      <p:sp>
+        <p:nvSpPr>
+          <p:cNvPr id="20" name="TextBox 19"/>
+          <p:cNvSpPr txBox="1"/>
+          <p:nvPr/>
+        </p:nvSpPr>
+        <p:spPr>
+          <a:xfrm>
+            <a:off x="8160100" y="3220000"/>
+            <a:ext cx="2900000" cy="400000"/>
+          </a:xfrm>
+          <a:prstGeom prst="rect">
+            <a:avLst/>
+          </a:prstGeom>
+          <a:noFill/>
+        </p:spPr>
+        <p:txBody>
+          <a:bodyPr wrap="square" lIns="0" rIns="0" tIns="0" bIns="0">
+            <a:spAutoFit/>
+          </a:bodyPr>
+          <a:lstStyle/>
+          <a:p>
+            <a:pPr algn="l">
+              <a:spcAft>
+                <a:spcPts val="600"/>
+              </a:spcAft>
+            </a:pPr>
+            <a:r>
+              <a:rPr sz="1450" b="1">
+                <a:solidFill>
+                  <a:srgbClr val="16161A"/>
+                </a:solidFill>
+                <a:latin typeface="Helvetica Neue"/>
+              </a:rPr>
+              <a:t>Dạy bằng lời giải sách</a:t>
+            </a:r>
+          </a:p>
+        </p:txBody>
+      </p:sp>
+      <p:sp>
+        <p:nvSpPr>
+          <p:cNvPr id="21" name="TextBox 20"/>
+          <p:cNvSpPr txBox="1"/>
+          <p:nvPr/>
+        </p:nvSpPr>
+        <p:spPr>
+          <a:xfrm>
+            <a:off x="8160100" y="3700000"/>
+            <a:ext cx="2900000" cy="900000"/>
+          </a:xfrm>
+          <a:prstGeom prst="rect">
+            <a:avLst/>
+          </a:prstGeom>
+          <a:noFill/>
+        </p:spPr>
+        <p:txBody>
+          <a:bodyPr wrap="square" lIns="0" rIns="0" tIns="0" bIns="0">
+            <a:spAutoFit/>
+          </a:bodyPr>
+          <a:lstStyle/>
+          <a:p>
+            <a:pPr algn="l">
+              <a:lnSpc>
+                <a:spcPct val="130000"/>
+              </a:lnSpc>
+              <a:spcAft>
+                <a:spcPts val="600"/>
+              </a:spcAft>
+            </a:pPr>
+            <a:r>
+              <a:rPr sz="1200" b="0">
+                <a:solidFill>
+                  <a:srgbClr val="3F4149"/>
+                </a:solidFill>
+                <a:latin typeface="Helvetica Neue"/>
+              </a:rPr>
+              <a:t>Thay bài model tự làm bằng</a:t>
+            </a:r>
+          </a:p>
+          <a:p>
+            <a:pPr algn="l">
+              <a:lnSpc>
+                <a:spcPct val="130000"/>
+              </a:lnSpc>
+              <a:spcAft>
+                <a:spcPts val="600"/>
+              </a:spcAft>
+            </a:pPr>
+            <a:r>
+              <a:rPr sz="1200" b="0">
+                <a:solidFill>
+                  <a:srgbClr val="3F4149"/>
+                </a:solidFill>
+                <a:latin typeface="Helvetica Neue"/>
+              </a:rPr>
+              <a:t>lời giải mẫu trong sách.</a:t>
+            </a:r>
+          </a:p>
+        </p:txBody>
+      </p:sp>
+      <p:cxnSp>
+        <p:nvCxnSpPr>
+          <p:cNvPr id="22" name="Connector 21"/>
+          <p:cNvCxnSpPr/>
+          <p:nvPr/>
+        </p:nvCxnSpPr>
+        <p:spPr>
+          <a:xfrm>
+            <a:off x="8160100" y="4620000"/>
+            <a:ext cx="2820000" cy="0"/>
+          </a:xfrm>
+          <a:prstGeom prst="line">
+            <a:avLst/>
+          </a:prstGeom>
+          <a:ln w="9525">
+            <a:solidFill>
+              <a:srgbClr val="DDDDE2"/>
+            </a:solidFill>
+          </a:ln>
+        </p:spPr>
+        <p:style>
+          <a:lnRef idx="2">
+            <a:schemeClr val="accent1"/>
+          </a:lnRef>
+          <a:fillRef idx="0">
+            <a:schemeClr val="accent1"/>
+          </a:fillRef>
+          <a:effectRef idx="1">
+            <a:schemeClr val="accent1"/>
+          </a:effectRef>
+          <a:fontRef idx="minor">
+            <a:schemeClr val="tx1"/>
+          </a:fontRef>
+        </p:style>
+      </p:cxnSp>
+      <p:sp>
+        <p:nvSpPr>
+          <p:cNvPr id="23" name="TextBox 22"/>
+          <p:cNvSpPr txBox="1"/>
+          <p:nvPr/>
+        </p:nvSpPr>
+        <p:spPr>
+          <a:xfrm>
+            <a:off x="8160100" y="4750000"/>
+            <a:ext cx="2900000" cy="650000"/>
+          </a:xfrm>
+          <a:prstGeom prst="rect">
+            <a:avLst/>
+          </a:prstGeom>
+          <a:noFill/>
+        </p:spPr>
+        <p:txBody>
+          <a:bodyPr wrap="square" lIns="0" rIns="0" tIns="0" bIns="0">
+            <a:spAutoFit/>
+          </a:bodyPr>
+          <a:lstStyle/>
+          <a:p>
+            <a:pPr algn="l">
+              <a:lnSpc>
+                <a:spcPct val="130000"/>
+              </a:lnSpc>
+              <a:spcAft>
+                <a:spcPts val="600"/>
+              </a:spcAft>
+            </a:pPr>
+            <a:r>
+              <a:rPr sz="1200" b="1">
+                <a:solidFill>
+                  <a:srgbClr val="029E73"/>
+                </a:solidFill>
+                <a:latin typeface="Helvetica Neue"/>
+              </a:rPr>
+              <a:t>Nếu vẫn tụt: lỗi ở việc dạy</a:t>
+            </a:r>
+          </a:p>
+          <a:p>
+            <a:pPr algn="l">
+              <a:lnSpc>
+                <a:spcPct val="130000"/>
+              </a:lnSpc>
+              <a:spcAft>
+                <a:spcPts val="600"/>
+              </a:spcAft>
+            </a:pPr>
+            <a:r>
+              <a:rPr sz="1200" b="1">
+                <a:solidFill>
+                  <a:srgbClr val="029E73"/>
+                </a:solidFill>
+                <a:latin typeface="Helvetica Neue"/>
+              </a:rPr>
+              <a:t>thêm, không ở chuyện tự học.</a:t>
+            </a:r>
+          </a:p>
+        </p:txBody>
+      </p:sp>
+      <p:sp>
+        <p:nvSpPr>
+          <p:cNvPr id="24" name="TextBox 23"/>
+          <p:cNvSpPr txBox="1"/>
+          <p:nvPr/>
+        </p:nvSpPr>
+        <p:spPr>
+          <a:xfrm>
+            <a:off x="800100" y="5750000"/>
+            <a:ext cx="10591495" cy="600000"/>
+          </a:xfrm>
+          <a:prstGeom prst="rect">
+            <a:avLst/>
+          </a:prstGeom>
+          <a:noFill/>
+        </p:spPr>
+        <p:txBody>
+          <a:bodyPr wrap="square" lIns="0" rIns="0" tIns="0" bIns="0">
+            <a:spAutoFit/>
+          </a:bodyPr>
+          <a:lstStyle/>
+          <a:p>
+            <a:pPr algn="l">
+              <a:lnSpc>
+                <a:spcPct val="140000"/>
+              </a:lnSpc>
+              <a:spcAft>
+                <a:spcPts val="600"/>
+              </a:spcAft>
+            </a:pPr>
+            <a:r>
+              <a:rPr sz="1200" b="0">
+                <a:solidFill>
+                  <a:srgbClr val="8A8D96"/>
+                </a:solidFill>
+                <a:latin typeface="Helvetica Neue"/>
+              </a:rPr>
+              <a:t>Khả năng đơn giản nhất chưa loại trừ: model đang dùng là bản Instruct đã được tinh chỉnh kỹ, dạy</a:t>
+            </a:r>
+          </a:p>
+          <a:p>
+            <a:pPr algn="l">
+              <a:lnSpc>
+                <a:spcPct val="140000"/>
+              </a:lnSpc>
+              <a:spcAft>
+                <a:spcPts val="600"/>
+              </a:spcAft>
+            </a:pPr>
+            <a:r>
+              <a:rPr sz="1200" b="0">
+                <a:solidFill>
+                  <a:srgbClr val="8A8D96"/>
+                </a:solidFill>
+                <a:latin typeface="Helvetica Neue"/>
+              </a:rPr>
+              <a:t>thêm một lượng nhỏ có thể chỉ làm nó lệch đi. Thí nghiệm thứ ba kiểm tra đúng điều này.</a:t>
             </a:r>
           </a:p>
         </p:txBody>
@@ -6707,7 +7875,7 @@
                 </a:solidFill>
                 <a:latin typeface="Helvetica Neue"/>
               </a:rPr>
-              <a:t>KẾ HOẠCH</a:t>
+              <a:t>HẠN CHẾ</a:t>
             </a:r>
           </a:p>
         </p:txBody>
@@ -6788,7 +7956,7 @@
                 </a:solidFill>
                 <a:latin typeface="Georgia"/>
               </a:rPr>
-              <a:t>Một lần chạy, so với kết quả đã có</a:t>
+              <a:t>Ba điểm cần lưu ý khi đọc kết quả</a:t>
             </a:r>
           </a:p>
         </p:txBody>
@@ -6801,8 +7969,8 @@
         </p:nvSpPr>
         <p:spPr>
           <a:xfrm>
-            <a:off x="800100" y="1650000"/>
-            <a:ext cx="3300000" cy="1500000"/>
+            <a:off x="680100" y="2000000"/>
+            <a:ext cx="10831495" cy="1150000"/>
           </a:xfrm>
           <a:prstGeom prst="roundRect">
             <a:avLst>
@@ -6847,33 +8015,33 @@
         </p:nvSpPr>
         <p:spPr>
           <a:xfrm>
-            <a:off x="1040100" y="1800000"/>
-            <a:ext cx="400000" cy="330000"/>
-          </a:xfrm>
-          <a:prstGeom prst="rect">
-            <a:avLst/>
-          </a:prstGeom>
-          <a:noFill/>
-        </p:spPr>
-        <p:txBody>
-          <a:bodyPr wrap="square" lIns="0" rIns="0" tIns="0" bIns="0">
-            <a:spAutoFit/>
-          </a:bodyPr>
-          <a:lstStyle/>
-          <a:p>
-            <a:pPr algn="l">
-              <a:spcAft>
-                <a:spcPts val="600"/>
-              </a:spcAft>
-            </a:pPr>
-            <a:r>
-              <a:rPr sz="1700" b="1">
+            <a:off x="920100" y="2200000"/>
+            <a:ext cx="400000" cy="300000"/>
+          </a:xfrm>
+          <a:prstGeom prst="rect">
+            <a:avLst/>
+          </a:prstGeom>
+          <a:noFill/>
+        </p:spPr>
+        <p:txBody>
+          <a:bodyPr wrap="square" lIns="0" rIns="0" tIns="0" bIns="0">
+            <a:spAutoFit/>
+          </a:bodyPr>
+          <a:lstStyle/>
+          <a:p>
+            <a:pPr algn="l">
+              <a:spcAft>
+                <a:spcPts val="600"/>
+              </a:spcAft>
+            </a:pPr>
+            <a:r>
+              <a:rPr sz="1300" b="1">
                 <a:solidFill>
                   <a:srgbClr val="9E2B34"/>
                 </a:solidFill>
                 <a:latin typeface="Georgia"/>
               </a:rPr>
-              <a:t>1</a:t>
+              <a:t>01</a:t>
             </a:r>
           </a:p>
         </p:txBody>
@@ -6886,33 +8054,33 @@
         </p:nvSpPr>
         <p:spPr>
           <a:xfrm>
-            <a:off x="1040100" y="2200000"/>
-            <a:ext cx="2900000" cy="330000"/>
-          </a:xfrm>
-          <a:prstGeom prst="rect">
-            <a:avLst/>
-          </a:prstGeom>
-          <a:noFill/>
-        </p:spPr>
-        <p:txBody>
-          <a:bodyPr wrap="square" lIns="0" rIns="0" tIns="0" bIns="0">
-            <a:spAutoFit/>
-          </a:bodyPr>
-          <a:lstStyle/>
-          <a:p>
-            <a:pPr algn="l">
-              <a:spcAft>
-                <a:spcPts val="600"/>
-              </a:spcAft>
-            </a:pPr>
-            <a:r>
-              <a:rPr sz="1450" b="1">
+            <a:off x="1500100" y="2190000"/>
+            <a:ext cx="9500000" cy="300000"/>
+          </a:xfrm>
+          <a:prstGeom prst="rect">
+            <a:avLst/>
+          </a:prstGeom>
+          <a:noFill/>
+        </p:spPr>
+        <p:txBody>
+          <a:bodyPr wrap="square" lIns="0" rIns="0" tIns="0" bIns="0">
+            <a:spAutoFit/>
+          </a:bodyPr>
+          <a:lstStyle/>
+          <a:p>
+            <a:pPr algn="l">
+              <a:spcAft>
+                <a:spcPts val="600"/>
+              </a:spcAft>
+            </a:pPr>
+            <a:r>
+              <a:rPr sz="1400" b="1">
                 <a:solidFill>
                   <a:srgbClr val="16161A"/>
                 </a:solidFill>
                 <a:latin typeface="Helvetica Neue"/>
               </a:rPr>
-              <a:t>Giữ nguyên mọi thứ</a:t>
+              <a:t>Đề thi chỉ có 150 đề</a:t>
             </a:r>
           </a:p>
         </p:txBody>
@@ -6925,8 +8093,8 @@
         </p:nvSpPr>
         <p:spPr>
           <a:xfrm>
-            <a:off x="1040100" y="2580000"/>
-            <a:ext cx="2900000" cy="550000"/>
+            <a:off x="1500100" y="2600000"/>
+            <a:ext cx="9500000" cy="450000"/>
           </a:xfrm>
           <a:prstGeom prst="rect">
             <a:avLst/>
@@ -6954,26 +8122,7 @@
                 </a:solidFill>
                 <a:latin typeface="Helvetica Neue"/>
               </a:rPr>
-              <a:t>Cùng model, cùng bộ đề, cùng</a:t>
-            </a:r>
-          </a:p>
-          <a:p>
-            <a:pPr algn="l">
-              <a:lnSpc>
-                <a:spcPct val="130000"/>
-              </a:lnSpc>
-              <a:spcAft>
-                <a:spcPts val="600"/>
-              </a:spcAft>
-            </a:pPr>
-            <a:r>
-              <a:rPr sz="1200" b="0">
-                <a:solidFill>
-                  <a:srgbClr val="3F4149"/>
-                </a:solidFill>
-                <a:latin typeface="Helvetica Neue"/>
-              </a:rPr>
-              <a:t>cách chia đề thi như lần chạy A.</a:t>
+              <a:t>Mỗi đề đáng 0,67 điểm. Chỉ đổi cách bốc đề thi thôi là điểm vòng 0 đã lệch 4,7 điểm, lớn hơn cả hiệu ứng đang đo.</a:t>
             </a:r>
           </a:p>
         </p:txBody>
@@ -6986,8 +8135,8 @@
         </p:nvSpPr>
         <p:spPr>
           <a:xfrm>
-            <a:off x="4360100" y="1650000"/>
-            <a:ext cx="3300000" cy="1500000"/>
+            <a:off x="680100" y="3330000"/>
+            <a:ext cx="10831495" cy="1150000"/>
           </a:xfrm>
           <a:prstGeom prst="roundRect">
             <a:avLst>
@@ -7032,33 +8181,33 @@
         </p:nvSpPr>
         <p:spPr>
           <a:xfrm>
-            <a:off x="4600100" y="1800000"/>
-            <a:ext cx="400000" cy="330000"/>
-          </a:xfrm>
-          <a:prstGeom prst="rect">
-            <a:avLst/>
-          </a:prstGeom>
-          <a:noFill/>
-        </p:spPr>
-        <p:txBody>
-          <a:bodyPr wrap="square" lIns="0" rIns="0" tIns="0" bIns="0">
-            <a:spAutoFit/>
-          </a:bodyPr>
-          <a:lstStyle/>
-          <a:p>
-            <a:pPr algn="l">
-              <a:spcAft>
-                <a:spcPts val="600"/>
-              </a:spcAft>
-            </a:pPr>
-            <a:r>
-              <a:rPr sz="1700" b="1">
+            <a:off x="920100" y="3530000"/>
+            <a:ext cx="400000" cy="300000"/>
+          </a:xfrm>
+          <a:prstGeom prst="rect">
+            <a:avLst/>
+          </a:prstGeom>
+          <a:noFill/>
+        </p:spPr>
+        <p:txBody>
+          <a:bodyPr wrap="square" lIns="0" rIns="0" tIns="0" bIns="0">
+            <a:spAutoFit/>
+          </a:bodyPr>
+          <a:lstStyle/>
+          <a:p>
+            <a:pPr algn="l">
+              <a:spcAft>
+                <a:spcPts val="600"/>
+              </a:spcAft>
+            </a:pPr>
+            <a:r>
+              <a:rPr sz="1300" b="1">
                 <a:solidFill>
                   <a:srgbClr val="9E2B34"/>
                 </a:solidFill>
                 <a:latin typeface="Georgia"/>
               </a:rPr>
-              <a:t>2</a:t>
+              <a:t>02</a:t>
             </a:r>
           </a:p>
         </p:txBody>
@@ -7071,33 +8220,33 @@
         </p:nvSpPr>
         <p:spPr>
           <a:xfrm>
-            <a:off x="4600100" y="2200000"/>
-            <a:ext cx="2900000" cy="330000"/>
-          </a:xfrm>
-          <a:prstGeom prst="rect">
-            <a:avLst/>
-          </a:prstGeom>
-          <a:noFill/>
-        </p:spPr>
-        <p:txBody>
-          <a:bodyPr wrap="square" lIns="0" rIns="0" tIns="0" bIns="0">
-            <a:spAutoFit/>
-          </a:bodyPr>
-          <a:lstStyle/>
-          <a:p>
-            <a:pPr algn="l">
-              <a:spcAft>
-                <a:spcPts val="600"/>
-              </a:spcAft>
-            </a:pPr>
-            <a:r>
-              <a:rPr sz="1450" b="1">
+            <a:off x="1500100" y="3520000"/>
+            <a:ext cx="9500000" cy="300000"/>
+          </a:xfrm>
+          <a:prstGeom prst="rect">
+            <a:avLst/>
+          </a:prstGeom>
+          <a:noFill/>
+        </p:spPr>
+        <p:txBody>
+          <a:bodyPr wrap="square" lIns="0" rIns="0" tIns="0" bIns="0">
+            <a:spAutoFit/>
+          </a:bodyPr>
+          <a:lstStyle/>
+          <a:p>
+            <a:pPr algn="l">
+              <a:spcAft>
+                <a:spcPts val="600"/>
+              </a:spcAft>
+            </a:pPr>
+            <a:r>
+              <a:rPr sz="1400" b="1">
                 <a:solidFill>
                   <a:srgbClr val="16161A"/>
                 </a:solidFill>
                 <a:latin typeface="Helvetica Neue"/>
               </a:rPr>
-              <a:t>Chỉ đổi một chỗ</a:t>
+              <a:t>Mỗi cấu hình mới chạy 2 lần</a:t>
             </a:r>
           </a:p>
         </p:txBody>
@@ -7110,8 +8259,8 @@
         </p:nvSpPr>
         <p:spPr>
           <a:xfrm>
-            <a:off x="4600100" y="2580000"/>
-            <a:ext cx="2900000" cy="550000"/>
+            <a:off x="1500100" y="3930000"/>
+            <a:ext cx="9500000" cy="450000"/>
           </a:xfrm>
           <a:prstGeom prst="rect">
             <a:avLst/>
@@ -7139,26 +8288,7 @@
                 </a:solidFill>
                 <a:latin typeface="Helvetica Neue"/>
               </a:rPr>
-              <a:t>Bật bản sửa lỗi \boxed.</a:t>
-            </a:r>
-          </a:p>
-          <a:p>
-            <a:pPr algn="l">
-              <a:lnSpc>
-                <a:spcPct val="130000"/>
-              </a:lnSpc>
-              <a:spcAft>
-                <a:spcPts val="600"/>
-              </a:spcAft>
-            </a:pPr>
-            <a:r>
-              <a:rPr sz="1200" b="0">
-                <a:solidFill>
-                  <a:srgbClr val="3F4149"/>
-                </a:solidFill>
-                <a:latin typeface="Helvetica Neue"/>
-              </a:rPr>
-              <a:t>Khoảng 5 giờ GPU.</a:t>
+              <a:t>Riêng lần chạy C và các lần chạy cũ mới có 1 lần. Chưa đủ cơ sở để khẳng định về cú tụt 12,7 điểm của GSM8K.</a:t>
             </a:r>
           </a:p>
         </p:txBody>
@@ -7171,8 +8301,8 @@
         </p:nvSpPr>
         <p:spPr>
           <a:xfrm>
-            <a:off x="7920100" y="1650000"/>
-            <a:ext cx="3300000" cy="1500000"/>
+            <a:off x="680100" y="4660000"/>
+            <a:ext cx="10831495" cy="1150000"/>
           </a:xfrm>
           <a:prstGeom prst="roundRect">
             <a:avLst>
@@ -7217,33 +8347,33 @@
         </p:nvSpPr>
         <p:spPr>
           <a:xfrm>
-            <a:off x="8160100" y="1800000"/>
-            <a:ext cx="400000" cy="330000"/>
-          </a:xfrm>
-          <a:prstGeom prst="rect">
-            <a:avLst/>
-          </a:prstGeom>
-          <a:noFill/>
-        </p:spPr>
-        <p:txBody>
-          <a:bodyPr wrap="square" lIns="0" rIns="0" tIns="0" bIns="0">
-            <a:spAutoFit/>
-          </a:bodyPr>
-          <a:lstStyle/>
-          <a:p>
-            <a:pPr algn="l">
-              <a:spcAft>
-                <a:spcPts val="600"/>
-              </a:spcAft>
-            </a:pPr>
-            <a:r>
-              <a:rPr sz="1700" b="1">
+            <a:off x="920100" y="4860000"/>
+            <a:ext cx="400000" cy="300000"/>
+          </a:xfrm>
+          <a:prstGeom prst="rect">
+            <a:avLst/>
+          </a:prstGeom>
+          <a:noFill/>
+        </p:spPr>
+        <p:txBody>
+          <a:bodyPr wrap="square" lIns="0" rIns="0" tIns="0" bIns="0">
+            <a:spAutoFit/>
+          </a:bodyPr>
+          <a:lstStyle/>
+          <a:p>
+            <a:pPr algn="l">
+              <a:spcAft>
+                <a:spcPts val="600"/>
+              </a:spcAft>
+            </a:pPr>
+            <a:r>
+              <a:rPr sz="1300" b="1">
                 <a:solidFill>
                   <a:srgbClr val="9E2B34"/>
                 </a:solidFill>
                 <a:latin typeface="Georgia"/>
               </a:rPr>
-              <a:t>3</a:t>
+              <a:t>03</a:t>
             </a:r>
           </a:p>
         </p:txBody>
@@ -7256,33 +8386,33 @@
         </p:nvSpPr>
         <p:spPr>
           <a:xfrm>
-            <a:off x="8160100" y="2200000"/>
-            <a:ext cx="2900000" cy="330000"/>
-          </a:xfrm>
-          <a:prstGeom prst="rect">
-            <a:avLst/>
-          </a:prstGeom>
-          <a:noFill/>
-        </p:spPr>
-        <p:txBody>
-          <a:bodyPr wrap="square" lIns="0" rIns="0" tIns="0" bIns="0">
-            <a:spAutoFit/>
-          </a:bodyPr>
-          <a:lstStyle/>
-          <a:p>
-            <a:pPr algn="l">
-              <a:spcAft>
-                <a:spcPts val="600"/>
-              </a:spcAft>
-            </a:pPr>
-            <a:r>
-              <a:rPr sz="1450" b="1">
+            <a:off x="1500100" y="4850000"/>
+            <a:ext cx="9500000" cy="300000"/>
+          </a:xfrm>
+          <a:prstGeom prst="rect">
+            <a:avLst/>
+          </a:prstGeom>
+          <a:noFill/>
+        </p:spPr>
+        <p:txBody>
+          <a:bodyPr wrap="square" lIns="0" rIns="0" tIns="0" bIns="0">
+            <a:spAutoFit/>
+          </a:bodyPr>
+          <a:lstStyle/>
+          <a:p>
+            <a:pPr algn="l">
+              <a:spcAft>
+                <a:spcPts val="600"/>
+              </a:spcAft>
+            </a:pPr>
+            <a:r>
+              <a:rPr sz="1400" b="1">
                 <a:solidFill>
                   <a:srgbClr val="16161A"/>
                 </a:solidFill>
                 <a:latin typeface="Helvetica Neue"/>
               </a:rPr>
-              <a:t>So với lần chạy A</a:t>
+              <a:t>Lần chạy mới khác lần cũ ba chỗ</a:t>
             </a:r>
           </a:p>
         </p:txBody>
@@ -7295,8 +8425,8 @@
         </p:nvSpPr>
         <p:spPr>
           <a:xfrm>
-            <a:off x="8160100" y="2580000"/>
-            <a:ext cx="2900000" cy="550000"/>
+            <a:off x="1500100" y="5260000"/>
+            <a:ext cx="9500000" cy="450000"/>
           </a:xfrm>
           <a:prstGeom prst="rect">
             <a:avLst/>
@@ -7324,428 +8454,7 @@
                 </a:solidFill>
                 <a:latin typeface="Helvetica Neue"/>
               </a:rPr>
-              <a:t>Lần A đã có sẵn số liệu,</a:t>
-            </a:r>
-          </a:p>
-          <a:p>
-            <a:pPr algn="l">
-              <a:lnSpc>
-                <a:spcPct val="130000"/>
-              </a:lnSpc>
-              <a:spcAft>
-                <a:spcPts val="600"/>
-              </a:spcAft>
-            </a:pPr>
-            <a:r>
-              <a:rPr sz="1200" b="0">
-                <a:solidFill>
-                  <a:srgbClr val="3F4149"/>
-                </a:solidFill>
-                <a:latin typeface="Helvetica Neue"/>
-              </a:rPr>
-              <a:t>không cần chạy lại.</a:t>
-            </a:r>
-          </a:p>
-        </p:txBody>
-      </p:sp>
-      <p:sp>
-        <p:nvSpPr>
-          <p:cNvPr id="17" name="TextBox 16"/>
-          <p:cNvSpPr txBox="1"/>
-          <p:nvPr/>
-        </p:nvSpPr>
-        <p:spPr>
-          <a:xfrm>
-            <a:off x="800100" y="3450000"/>
-            <a:ext cx="10591495" cy="300000"/>
-          </a:xfrm>
-          <a:prstGeom prst="rect">
-            <a:avLst/>
-          </a:prstGeom>
-          <a:noFill/>
-        </p:spPr>
-        <p:txBody>
-          <a:bodyPr wrap="square" lIns="0" rIns="0" tIns="0" bIns="0">
-            <a:spAutoFit/>
-          </a:bodyPr>
-          <a:lstStyle/>
-          <a:p>
-            <a:pPr algn="l">
-              <a:spcAft>
-                <a:spcPts val="600"/>
-              </a:spcAft>
-            </a:pPr>
-            <a:r>
-              <a:rPr sz="1100" b="1">
-                <a:solidFill>
-                  <a:srgbClr val="8A8D96"/>
-                </a:solidFill>
-                <a:latin typeface="Helvetica Neue"/>
-              </a:rPr>
-              <a:t>HAI KẾT QUẢ CÓ THỂ XẢY RA</a:t>
-            </a:r>
-          </a:p>
-        </p:txBody>
-      </p:sp>
-      <p:sp>
-        <p:nvSpPr>
-          <p:cNvPr id="18" name="Rounded Rectangle 17"/>
-          <p:cNvSpPr/>
-          <p:nvPr/>
-        </p:nvSpPr>
-        <p:spPr>
-          <a:xfrm>
-            <a:off x="800100" y="3850000"/>
-            <a:ext cx="5190000" cy="1650000"/>
-          </a:xfrm>
-          <a:prstGeom prst="roundRect">
-            <a:avLst>
-              <a:gd name="adj" fmla="val 4000"/>
-            </a:avLst>
-          </a:prstGeom>
-          <a:solidFill>
-            <a:srgbClr val="F5F5F7"/>
-          </a:solidFill>
-          <a:ln>
-            <a:noFill/>
-          </a:ln>
-          <a:effectLst/>
-        </p:spPr>
-        <p:style>
-          <a:lnRef idx="1">
-            <a:schemeClr val="accent1"/>
-          </a:lnRef>
-          <a:fillRef idx="3">
-            <a:schemeClr val="accent1"/>
-          </a:fillRef>
-          <a:effectRef idx="2">
-            <a:schemeClr val="accent1"/>
-          </a:effectRef>
-          <a:fontRef idx="minor">
-            <a:schemeClr val="lt1"/>
-          </a:fontRef>
-        </p:style>
-        <p:txBody>
-          <a:bodyPr rtlCol="0" anchor="ctr"/>
-          <a:lstStyle/>
-          <a:p>
-            <a:pPr algn="ctr"/>
-          </a:p>
-        </p:txBody>
-      </p:sp>
-      <p:sp>
-        <p:nvSpPr>
-          <p:cNvPr id="19" name="Rounded Rectangle 18"/>
-          <p:cNvSpPr/>
-          <p:nvPr/>
-        </p:nvSpPr>
-        <p:spPr>
-          <a:xfrm>
-            <a:off x="1060100" y="4030000"/>
-            <a:ext cx="2600000" cy="320000"/>
-          </a:xfrm>
-          <a:prstGeom prst="roundRect">
-            <a:avLst>
-              <a:gd name="adj" fmla="val 50000"/>
-            </a:avLst>
-          </a:prstGeom>
-          <a:solidFill>
-            <a:srgbClr val="029E73"/>
-          </a:solidFill>
-          <a:ln>
-            <a:noFill/>
-          </a:ln>
-          <a:effectLst/>
-        </p:spPr>
-        <p:style>
-          <a:lnRef idx="1">
-            <a:schemeClr val="accent1"/>
-          </a:lnRef>
-          <a:fillRef idx="3">
-            <a:schemeClr val="accent1"/>
-          </a:fillRef>
-          <a:effectRef idx="2">
-            <a:schemeClr val="accent1"/>
-          </a:effectRef>
-          <a:fontRef idx="minor">
-            <a:schemeClr val="lt1"/>
-          </a:fontRef>
-        </p:style>
-        <p:txBody>
-          <a:bodyPr rtlCol="0" anchor="ctr" wrap="none" lIns="0" rIns="0"/>
-          <a:lstStyle/>
-          <a:p>
-            <a:pPr algn="ctr"/>
-            <a:r>
-              <a:rPr sz="1050" b="1">
-                <a:solidFill>
-                  <a:srgbClr val="FFFFFF"/>
-                </a:solidFill>
-                <a:latin typeface="Helvetica Neue"/>
-              </a:rPr>
-              <a:t>Điểm khác lần A rõ rệt</a:t>
-            </a:r>
-          </a:p>
-        </p:txBody>
-      </p:sp>
-      <p:sp>
-        <p:nvSpPr>
-          <p:cNvPr id="20" name="TextBox 19"/>
-          <p:cNvSpPr txBox="1"/>
-          <p:nvPr/>
-        </p:nvSpPr>
-        <p:spPr>
-          <a:xfrm>
-            <a:off x="1060100" y="4530000"/>
-            <a:ext cx="4700000" cy="800000"/>
-          </a:xfrm>
-          <a:prstGeom prst="rect">
-            <a:avLst/>
-          </a:prstGeom>
-          <a:noFill/>
-        </p:spPr>
-        <p:txBody>
-          <a:bodyPr wrap="square" lIns="0" rIns="0" tIns="0" bIns="0">
-            <a:spAutoFit/>
-          </a:bodyPr>
-          <a:lstStyle/>
-          <a:p>
-            <a:pPr algn="l">
-              <a:lnSpc>
-                <a:spcPct val="135000"/>
-              </a:lnSpc>
-              <a:spcAft>
-                <a:spcPts val="600"/>
-              </a:spcAft>
-            </a:pPr>
-            <a:r>
-              <a:rPr sz="1250" b="0">
-                <a:solidFill>
-                  <a:srgbClr val="3F4149"/>
-                </a:solidFill>
-                <a:latin typeface="Helvetica Neue"/>
-              </a:rPr>
-              <a:t>Lỗi phổ biến có gây hại. Ngưỡng bắt đầu</a:t>
-            </a:r>
-          </a:p>
-          <a:p>
-            <a:pPr algn="l">
-              <a:lnSpc>
-                <a:spcPct val="135000"/>
-              </a:lnSpc>
-              <a:spcAft>
-                <a:spcPts val="600"/>
-              </a:spcAft>
-            </a:pPr>
-            <a:r>
-              <a:rPr sz="1250" b="0">
-                <a:solidFill>
-                  <a:srgbClr val="3F4149"/>
-                </a:solidFill>
-                <a:latin typeface="Helvetica Neue"/>
-              </a:rPr>
-              <a:t>gây hại nằm đâu đó giữa 0,55% và 4,4%.</a:t>
-            </a:r>
-          </a:p>
-        </p:txBody>
-      </p:sp>
-      <p:sp>
-        <p:nvSpPr>
-          <p:cNvPr id="21" name="Rounded Rectangle 20"/>
-          <p:cNvSpPr/>
-          <p:nvPr/>
-        </p:nvSpPr>
-        <p:spPr>
-          <a:xfrm>
-            <a:off x="6200100" y="3850000"/>
-            <a:ext cx="5190000" cy="1650000"/>
-          </a:xfrm>
-          <a:prstGeom prst="roundRect">
-            <a:avLst>
-              <a:gd name="adj" fmla="val 4000"/>
-            </a:avLst>
-          </a:prstGeom>
-          <a:solidFill>
-            <a:srgbClr val="F5F5F7"/>
-          </a:solidFill>
-          <a:ln>
-            <a:noFill/>
-          </a:ln>
-          <a:effectLst/>
-        </p:spPr>
-        <p:style>
-          <a:lnRef idx="1">
-            <a:schemeClr val="accent1"/>
-          </a:lnRef>
-          <a:fillRef idx="3">
-            <a:schemeClr val="accent1"/>
-          </a:fillRef>
-          <a:effectRef idx="2">
-            <a:schemeClr val="accent1"/>
-          </a:effectRef>
-          <a:fontRef idx="minor">
-            <a:schemeClr val="lt1"/>
-          </a:fontRef>
-        </p:style>
-        <p:txBody>
-          <a:bodyPr rtlCol="0" anchor="ctr"/>
-          <a:lstStyle/>
-          <a:p>
-            <a:pPr algn="ctr"/>
-          </a:p>
-        </p:txBody>
-      </p:sp>
-      <p:sp>
-        <p:nvSpPr>
-          <p:cNvPr id="22" name="Rounded Rectangle 21"/>
-          <p:cNvSpPr/>
-          <p:nvPr/>
-        </p:nvSpPr>
-        <p:spPr>
-          <a:xfrm>
-            <a:off x="6460100" y="4030000"/>
-            <a:ext cx="2600000" cy="320000"/>
-          </a:xfrm>
-          <a:prstGeom prst="roundRect">
-            <a:avLst>
-              <a:gd name="adj" fmla="val 50000"/>
-            </a:avLst>
-          </a:prstGeom>
-          <a:solidFill>
-            <a:srgbClr val="B85C00"/>
-          </a:solidFill>
-          <a:ln>
-            <a:noFill/>
-          </a:ln>
-          <a:effectLst/>
-        </p:spPr>
-        <p:style>
-          <a:lnRef idx="1">
-            <a:schemeClr val="accent1"/>
-          </a:lnRef>
-          <a:fillRef idx="3">
-            <a:schemeClr val="accent1"/>
-          </a:fillRef>
-          <a:effectRef idx="2">
-            <a:schemeClr val="accent1"/>
-          </a:effectRef>
-          <a:fontRef idx="minor">
-            <a:schemeClr val="lt1"/>
-          </a:fontRef>
-        </p:style>
-        <p:txBody>
-          <a:bodyPr rtlCol="0" anchor="ctr" wrap="none" lIns="0" rIns="0"/>
-          <a:lstStyle/>
-          <a:p>
-            <a:pPr algn="ctr"/>
-            <a:r>
-              <a:rPr sz="1050" b="1">
-                <a:solidFill>
-                  <a:srgbClr val="FFFFFF"/>
-                </a:solidFill>
-                <a:latin typeface="Helvetica Neue"/>
-              </a:rPr>
-              <a:t>Điểm gần như lần A</a:t>
-            </a:r>
-          </a:p>
-        </p:txBody>
-      </p:sp>
-      <p:sp>
-        <p:nvSpPr>
-          <p:cNvPr id="23" name="TextBox 22"/>
-          <p:cNvSpPr txBox="1"/>
-          <p:nvPr/>
-        </p:nvSpPr>
-        <p:spPr>
-          <a:xfrm>
-            <a:off x="6460100" y="4530000"/>
-            <a:ext cx="4700000" cy="800000"/>
-          </a:xfrm>
-          <a:prstGeom prst="rect">
-            <a:avLst/>
-          </a:prstGeom>
-          <a:noFill/>
-        </p:spPr>
-        <p:txBody>
-          <a:bodyPr wrap="square" lIns="0" rIns="0" tIns="0" bIns="0">
-            <a:spAutoFit/>
-          </a:bodyPr>
-          <a:lstStyle/>
-          <a:p>
-            <a:pPr algn="l">
-              <a:lnSpc>
-                <a:spcPct val="135000"/>
-              </a:lnSpc>
-              <a:spcAft>
-                <a:spcPts val="600"/>
-              </a:spcAft>
-            </a:pPr>
-            <a:r>
-              <a:rPr sz="1250" b="0">
-                <a:solidFill>
-                  <a:srgbClr val="3F4149"/>
-                </a:solidFill>
-                <a:latin typeface="Helvetica Neue"/>
-              </a:rPr>
-              <a:t>Kể cả lỗi gấp 8 lần cũng vô hại. Kết luận</a:t>
-            </a:r>
-          </a:p>
-          <a:p>
-            <a:pPr algn="l">
-              <a:lnSpc>
-                <a:spcPct val="135000"/>
-              </a:lnSpc>
-              <a:spcAft>
-                <a:spcPts val="600"/>
-              </a:spcAft>
-            </a:pPr>
-            <a:r>
-              <a:rPr sz="1250" b="0">
-                <a:solidFill>
-                  <a:srgbClr val="3F4149"/>
-                </a:solidFill>
-                <a:latin typeface="Helvetica Neue"/>
-              </a:rPr>
-              <a:t>"lỗi máy chấm không phải thủ phạm" càng chắc.</a:t>
-            </a:r>
-          </a:p>
-        </p:txBody>
-      </p:sp>
-      <p:sp>
-        <p:nvSpPr>
-          <p:cNvPr id="24" name="TextBox 23"/>
-          <p:cNvSpPr txBox="1"/>
-          <p:nvPr/>
-        </p:nvSpPr>
-        <p:spPr>
-          <a:xfrm>
-            <a:off x="800100" y="5800000"/>
-            <a:ext cx="10591495" cy="400000"/>
-          </a:xfrm>
-          <a:prstGeom prst="rect">
-            <a:avLst/>
-          </a:prstGeom>
-          <a:noFill/>
-        </p:spPr>
-        <p:txBody>
-          <a:bodyPr wrap="square" lIns="0" rIns="0" tIns="0" bIns="0">
-            <a:spAutoFit/>
-          </a:bodyPr>
-          <a:lstStyle/>
-          <a:p>
-            <a:pPr algn="l">
-              <a:spcAft>
-                <a:spcPts val="600"/>
-              </a:spcAft>
-            </a:pPr>
-            <a:r>
-              <a:rPr sz="1150" b="0">
-                <a:solidFill>
-                  <a:srgbClr val="8A8D96"/>
-                </a:solidFill>
-                <a:latin typeface="Helvetica Neue"/>
-              </a:rPr>
-              <a:t>Kết quả nào cũng viết được vào bài báo. Hàng đợi GPU: seed thứ hai cho GSM8K, ablation, rồi lần chạy này.</a:t>
+              <a:t>Bỏ gộp bộ đề, thêm đề thi riêng, giảm số đề. Nên kết luận chỉ dựa trên so sánh A với B, vì hai lần chạy đó chỉ khác nhau đúng một biến.</a:t>
             </a:r>
           </a:p>
         </p:txBody>
@@ -7802,7 +8511,7 @@
                 </a:solidFill>
                 <a:latin typeface="Helvetica Neue"/>
               </a:rPr>
-              <a:t>CÂU HỎI CHƯA TRẢ LỜI ĐƯỢC</a:t>
+              <a:t>TÓM TẮT</a:t>
             </a:r>
           </a:p>
         </p:txBody>
@@ -7842,1350 +8551,6 @@
                 <a:latin typeface="Georgia"/>
               </a:rPr>
               <a:t>15</a:t>
-            </a:r>
-          </a:p>
-        </p:txBody>
-      </p:sp>
-      <p:sp>
-        <p:nvSpPr>
-          <p:cNvPr id="4" name="TextBox 3"/>
-          <p:cNvSpPr txBox="1"/>
-          <p:nvPr/>
-        </p:nvSpPr>
-        <p:spPr>
-          <a:xfrm>
-            <a:off x="800100" y="790000"/>
-            <a:ext cx="10591495" cy="620000"/>
-          </a:xfrm>
-          <a:prstGeom prst="rect">
-            <a:avLst/>
-          </a:prstGeom>
-          <a:noFill/>
-        </p:spPr>
-        <p:txBody>
-          <a:bodyPr wrap="square" lIns="0" rIns="0" tIns="0" bIns="0">
-            <a:spAutoFit/>
-          </a:bodyPr>
-          <a:lstStyle/>
-          <a:p>
-            <a:pPr algn="l">
-              <a:lnSpc>
-                <a:spcPct val="105000"/>
-              </a:lnSpc>
-              <a:spcAft>
-                <a:spcPts val="600"/>
-              </a:spcAft>
-            </a:pPr>
-            <a:r>
-              <a:rPr sz="2900" b="1">
-                <a:solidFill>
-                  <a:srgbClr val="16161A"/>
-                </a:solidFill>
-                <a:latin typeface="Georgia"/>
-              </a:rPr>
-              <a:t>Thí nghiệm kiểm chứng đang chạy</a:t>
-            </a:r>
-          </a:p>
-        </p:txBody>
-      </p:sp>
-      <p:sp>
-        <p:nvSpPr>
-          <p:cNvPr id="5" name="TextBox 4"/>
-          <p:cNvSpPr txBox="1"/>
-          <p:nvPr/>
-        </p:nvSpPr>
-        <p:spPr>
-          <a:xfrm>
-            <a:off x="800100" y="1620000"/>
-            <a:ext cx="10591495" cy="700000"/>
-          </a:xfrm>
-          <a:prstGeom prst="rect">
-            <a:avLst/>
-          </a:prstGeom>
-          <a:noFill/>
-        </p:spPr>
-        <p:txBody>
-          <a:bodyPr wrap="square" lIns="0" rIns="0" tIns="0" bIns="0">
-            <a:spAutoFit/>
-          </a:bodyPr>
-          <a:lstStyle/>
-          <a:p>
-            <a:pPr algn="l">
-              <a:lnSpc>
-                <a:spcPct val="140000"/>
-              </a:lnSpc>
-              <a:spcAft>
-                <a:spcPts val="600"/>
-              </a:spcAft>
-            </a:pPr>
-            <a:r>
-              <a:rPr sz="1400" b="0">
-                <a:solidFill>
-                  <a:srgbClr val="16161A"/>
-                </a:solidFill>
-                <a:latin typeface="Helvetica Neue"/>
-              </a:rPr>
-              <a:t>Cả 7 lần chạy, điểm đều tụt khoảng 3 điểm ngay ở vòng 1 rồi đứng yên. Nhưng các công trình lớn</a:t>
-            </a:r>
-          </a:p>
-          <a:p>
-            <a:pPr algn="l">
-              <a:lnSpc>
-                <a:spcPct val="140000"/>
-              </a:lnSpc>
-              <a:spcAft>
-                <a:spcPts val="600"/>
-              </a:spcAft>
-            </a:pPr>
-            <a:r>
-              <a:rPr sz="1400" b="0">
-                <a:solidFill>
-                  <a:srgbClr val="16161A"/>
-                </a:solidFill>
-                <a:latin typeface="Helvetica Neue"/>
-              </a:rPr>
-              <a:t>về tự học đều báo cáo model KHÁ LÊN. Chưa giải thích được vì sao kết quả ở đây ngược lại.</a:t>
-            </a:r>
-          </a:p>
-        </p:txBody>
-      </p:sp>
-      <p:sp>
-        <p:nvSpPr>
-          <p:cNvPr id="6" name="Rounded Rectangle 5"/>
-          <p:cNvSpPr/>
-          <p:nvPr/>
-        </p:nvSpPr>
-        <p:spPr>
-          <a:xfrm>
-            <a:off x="680100" y="2550000"/>
-            <a:ext cx="10831495" cy="900000"/>
-          </a:xfrm>
-          <a:prstGeom prst="roundRect">
-            <a:avLst>
-              <a:gd name="adj" fmla="val 4000"/>
-            </a:avLst>
-          </a:prstGeom>
-          <a:solidFill>
-            <a:srgbClr val="F5F5F7"/>
-          </a:solidFill>
-          <a:ln>
-            <a:noFill/>
-          </a:ln>
-          <a:effectLst/>
-        </p:spPr>
-        <p:style>
-          <a:lnRef idx="1">
-            <a:schemeClr val="accent1"/>
-          </a:lnRef>
-          <a:fillRef idx="3">
-            <a:schemeClr val="accent1"/>
-          </a:fillRef>
-          <a:effectRef idx="2">
-            <a:schemeClr val="accent1"/>
-          </a:effectRef>
-          <a:fontRef idx="minor">
-            <a:schemeClr val="lt1"/>
-          </a:fontRef>
-        </p:style>
-        <p:txBody>
-          <a:bodyPr rtlCol="0" anchor="ctr"/>
-          <a:lstStyle/>
-          <a:p>
-            <a:pPr algn="ctr"/>
-          </a:p>
-        </p:txBody>
-      </p:sp>
-      <p:sp>
-        <p:nvSpPr>
-          <p:cNvPr id="7" name="TextBox 6"/>
-          <p:cNvSpPr txBox="1"/>
-          <p:nvPr/>
-        </p:nvSpPr>
-        <p:spPr>
-          <a:xfrm>
-            <a:off x="920100" y="2720000"/>
-            <a:ext cx="10351495" cy="640000"/>
-          </a:xfrm>
-          <a:prstGeom prst="rect">
-            <a:avLst/>
-          </a:prstGeom>
-          <a:noFill/>
-        </p:spPr>
-        <p:txBody>
-          <a:bodyPr wrap="square" lIns="0" rIns="0" tIns="0" bIns="0">
-            <a:spAutoFit/>
-          </a:bodyPr>
-          <a:lstStyle/>
-          <a:p>
-            <a:pPr algn="l">
-              <a:lnSpc>
-                <a:spcPct val="145000"/>
-              </a:lnSpc>
-              <a:spcAft>
-                <a:spcPts val="600"/>
-              </a:spcAft>
-            </a:pPr>
-            <a:r>
-              <a:rPr sz="1250" b="0">
-                <a:solidFill>
-                  <a:srgbClr val="3F4149"/>
-                </a:solidFill>
-                <a:latin typeface="Helvetica Neue"/>
-              </a:rPr>
-              <a:t>Có một khả năng đơn giản chưa loại trừ được: model này vốn đã được tinh chỉnh rất kỹ. Dạy thêm</a:t>
-            </a:r>
-          </a:p>
-          <a:p>
-            <a:pPr algn="l">
-              <a:lnSpc>
-                <a:spcPct val="145000"/>
-              </a:lnSpc>
-              <a:spcAft>
-                <a:spcPts val="600"/>
-              </a:spcAft>
-            </a:pPr>
-            <a:r>
-              <a:rPr sz="1250" b="0">
-                <a:solidFill>
-                  <a:srgbClr val="3F4149"/>
-                </a:solidFill>
-                <a:latin typeface="Helvetica Neue"/>
-              </a:rPr>
-              <a:t>một lượng nhỏ có thể chỉ làm nó lệch khỏi trạng thái tốt sẵn có, bất kể dạy bằng dữ liệu gì.</a:t>
-            </a:r>
-          </a:p>
-        </p:txBody>
-      </p:sp>
-      <p:sp>
-        <p:nvSpPr>
-          <p:cNvPr id="8" name="TextBox 7"/>
-          <p:cNvSpPr txBox="1"/>
-          <p:nvPr/>
-        </p:nvSpPr>
-        <p:spPr>
-          <a:xfrm>
-            <a:off x="800100" y="3720000"/>
-            <a:ext cx="10591495" cy="300000"/>
-          </a:xfrm>
-          <a:prstGeom prst="rect">
-            <a:avLst/>
-          </a:prstGeom>
-          <a:noFill/>
-        </p:spPr>
-        <p:txBody>
-          <a:bodyPr wrap="square" lIns="0" rIns="0" tIns="0" bIns="0">
-            <a:spAutoFit/>
-          </a:bodyPr>
-          <a:lstStyle/>
-          <a:p>
-            <a:pPr algn="l">
-              <a:spcAft>
-                <a:spcPts val="600"/>
-              </a:spcAft>
-            </a:pPr>
-            <a:r>
-              <a:rPr sz="1100" b="1">
-                <a:solidFill>
-                  <a:srgbClr val="8A8D96"/>
-                </a:solidFill>
-                <a:latin typeface="Helvetica Neue"/>
-              </a:rPr>
-              <a:t>THÍ NGHIỆM PHÂN ĐỊNH: dạy bằng lời giải mẫu của sách, thay vì bài model tự làm</a:t>
-            </a:r>
-          </a:p>
-        </p:txBody>
-      </p:sp>
-      <p:sp>
-        <p:nvSpPr>
-          <p:cNvPr id="9" name="Rounded Rectangle 8"/>
-          <p:cNvSpPr/>
-          <p:nvPr/>
-        </p:nvSpPr>
-        <p:spPr>
-          <a:xfrm>
-            <a:off x="800100" y="4180000"/>
-            <a:ext cx="5190000" cy="1350000"/>
-          </a:xfrm>
-          <a:prstGeom prst="roundRect">
-            <a:avLst>
-              <a:gd name="adj" fmla="val 4000"/>
-            </a:avLst>
-          </a:prstGeom>
-          <a:solidFill>
-            <a:srgbClr val="F5F5F7"/>
-          </a:solidFill>
-          <a:ln>
-            <a:noFill/>
-          </a:ln>
-          <a:effectLst/>
-        </p:spPr>
-        <p:style>
-          <a:lnRef idx="1">
-            <a:schemeClr val="accent1"/>
-          </a:lnRef>
-          <a:fillRef idx="3">
-            <a:schemeClr val="accent1"/>
-          </a:fillRef>
-          <a:effectRef idx="2">
-            <a:schemeClr val="accent1"/>
-          </a:effectRef>
-          <a:fontRef idx="minor">
-            <a:schemeClr val="lt1"/>
-          </a:fontRef>
-        </p:style>
-        <p:txBody>
-          <a:bodyPr rtlCol="0" anchor="ctr"/>
-          <a:lstStyle/>
-          <a:p>
-            <a:pPr algn="ctr"/>
-          </a:p>
-        </p:txBody>
-      </p:sp>
-      <p:sp>
-        <p:nvSpPr>
-          <p:cNvPr id="10" name="Rounded Rectangle 9"/>
-          <p:cNvSpPr/>
-          <p:nvPr/>
-        </p:nvSpPr>
-        <p:spPr>
-          <a:xfrm>
-            <a:off x="1040100" y="4360000"/>
-            <a:ext cx="1500000" cy="310000"/>
-          </a:xfrm>
-          <a:prstGeom prst="roundRect">
-            <a:avLst>
-              <a:gd name="adj" fmla="val 50000"/>
-            </a:avLst>
-          </a:prstGeom>
-          <a:solidFill>
-            <a:srgbClr val="029E73"/>
-          </a:solidFill>
-          <a:ln>
-            <a:noFill/>
-          </a:ln>
-          <a:effectLst/>
-        </p:spPr>
-        <p:style>
-          <a:lnRef idx="1">
-            <a:schemeClr val="accent1"/>
-          </a:lnRef>
-          <a:fillRef idx="3">
-            <a:schemeClr val="accent1"/>
-          </a:fillRef>
-          <a:effectRef idx="2">
-            <a:schemeClr val="accent1"/>
-          </a:effectRef>
-          <a:fontRef idx="minor">
-            <a:schemeClr val="lt1"/>
-          </a:fontRef>
-        </p:style>
-        <p:txBody>
-          <a:bodyPr rtlCol="0" anchor="ctr" wrap="none" lIns="0" rIns="0"/>
-          <a:lstStyle/>
-          <a:p>
-            <a:pPr algn="ctr"/>
-            <a:r>
-              <a:rPr sz="1050" b="1">
-                <a:solidFill>
-                  <a:srgbClr val="FFFFFF"/>
-                </a:solidFill>
-                <a:latin typeface="Helvetica Neue"/>
-              </a:rPr>
-              <a:t>Nếu khá lên</a:t>
-            </a:r>
-          </a:p>
-        </p:txBody>
-      </p:sp>
-      <p:sp>
-        <p:nvSpPr>
-          <p:cNvPr id="11" name="TextBox 10"/>
-          <p:cNvSpPr txBox="1"/>
-          <p:nvPr/>
-        </p:nvSpPr>
-        <p:spPr>
-          <a:xfrm>
-            <a:off x="1040100" y="4830000"/>
-            <a:ext cx="4700000" cy="600000"/>
-          </a:xfrm>
-          <a:prstGeom prst="rect">
-            <a:avLst/>
-          </a:prstGeom>
-          <a:noFill/>
-        </p:spPr>
-        <p:txBody>
-          <a:bodyPr wrap="square" lIns="0" rIns="0" tIns="0" bIns="0">
-            <a:spAutoFit/>
-          </a:bodyPr>
-          <a:lstStyle/>
-          <a:p>
-            <a:pPr algn="l">
-              <a:lnSpc>
-                <a:spcPct val="135000"/>
-              </a:lnSpc>
-              <a:spcAft>
-                <a:spcPts val="600"/>
-              </a:spcAft>
-            </a:pPr>
-            <a:r>
-              <a:rPr sz="1200" b="0">
-                <a:solidFill>
-                  <a:srgbClr val="3F4149"/>
-                </a:solidFill>
-                <a:latin typeface="Helvetica Neue"/>
-              </a:rPr>
-              <a:t>thì vòng lặp không sao, và cái hại đúng là</a:t>
-            </a:r>
-          </a:p>
-          <a:p>
-            <a:pPr algn="l">
-              <a:lnSpc>
-                <a:spcPct val="135000"/>
-              </a:lnSpc>
-              <a:spcAft>
-                <a:spcPts val="600"/>
-              </a:spcAft>
-            </a:pPr>
-            <a:r>
-              <a:rPr sz="1200" b="0">
-                <a:solidFill>
-                  <a:srgbClr val="3F4149"/>
-                </a:solidFill>
-                <a:latin typeface="Helvetica Neue"/>
-              </a:rPr>
-              <a:t>do model học từ bài của chính nó.</a:t>
-            </a:r>
-          </a:p>
-        </p:txBody>
-      </p:sp>
-      <p:sp>
-        <p:nvSpPr>
-          <p:cNvPr id="12" name="Rounded Rectangle 11"/>
-          <p:cNvSpPr/>
-          <p:nvPr/>
-        </p:nvSpPr>
-        <p:spPr>
-          <a:xfrm>
-            <a:off x="6200100" y="4180000"/>
-            <a:ext cx="5190000" cy="1350000"/>
-          </a:xfrm>
-          <a:prstGeom prst="roundRect">
-            <a:avLst>
-              <a:gd name="adj" fmla="val 4000"/>
-            </a:avLst>
-          </a:prstGeom>
-          <a:solidFill>
-            <a:srgbClr val="F5F5F7"/>
-          </a:solidFill>
-          <a:ln>
-            <a:noFill/>
-          </a:ln>
-          <a:effectLst/>
-        </p:spPr>
-        <p:style>
-          <a:lnRef idx="1">
-            <a:schemeClr val="accent1"/>
-          </a:lnRef>
-          <a:fillRef idx="3">
-            <a:schemeClr val="accent1"/>
-          </a:fillRef>
-          <a:effectRef idx="2">
-            <a:schemeClr val="accent1"/>
-          </a:effectRef>
-          <a:fontRef idx="minor">
-            <a:schemeClr val="lt1"/>
-          </a:fontRef>
-        </p:style>
-        <p:txBody>
-          <a:bodyPr rtlCol="0" anchor="ctr"/>
-          <a:lstStyle/>
-          <a:p>
-            <a:pPr algn="ctr"/>
-          </a:p>
-        </p:txBody>
-      </p:sp>
-      <p:sp>
-        <p:nvSpPr>
-          <p:cNvPr id="13" name="Rounded Rectangle 12"/>
-          <p:cNvSpPr/>
-          <p:nvPr/>
-        </p:nvSpPr>
-        <p:spPr>
-          <a:xfrm>
-            <a:off x="6440100" y="4360000"/>
-            <a:ext cx="1500000" cy="310000"/>
-          </a:xfrm>
-          <a:prstGeom prst="roundRect">
-            <a:avLst>
-              <a:gd name="adj" fmla="val 50000"/>
-            </a:avLst>
-          </a:prstGeom>
-          <a:solidFill>
-            <a:srgbClr val="B85C00"/>
-          </a:solidFill>
-          <a:ln>
-            <a:noFill/>
-          </a:ln>
-          <a:effectLst/>
-        </p:spPr>
-        <p:style>
-          <a:lnRef idx="1">
-            <a:schemeClr val="accent1"/>
-          </a:lnRef>
-          <a:fillRef idx="3">
-            <a:schemeClr val="accent1"/>
-          </a:fillRef>
-          <a:effectRef idx="2">
-            <a:schemeClr val="accent1"/>
-          </a:effectRef>
-          <a:fontRef idx="minor">
-            <a:schemeClr val="lt1"/>
-          </a:fontRef>
-        </p:style>
-        <p:txBody>
-          <a:bodyPr rtlCol="0" anchor="ctr" wrap="none" lIns="0" rIns="0"/>
-          <a:lstStyle/>
-          <a:p>
-            <a:pPr algn="ctr"/>
-            <a:r>
-              <a:rPr sz="1050" b="1">
-                <a:solidFill>
-                  <a:srgbClr val="FFFFFF"/>
-                </a:solidFill>
-                <a:latin typeface="Helvetica Neue"/>
-              </a:rPr>
-              <a:t>Nếu cũng tụt</a:t>
-            </a:r>
-          </a:p>
-        </p:txBody>
-      </p:sp>
-      <p:sp>
-        <p:nvSpPr>
-          <p:cNvPr id="14" name="TextBox 13"/>
-          <p:cNvSpPr txBox="1"/>
-          <p:nvPr/>
-        </p:nvSpPr>
-        <p:spPr>
-          <a:xfrm>
-            <a:off x="6440100" y="4830000"/>
-            <a:ext cx="4700000" cy="600000"/>
-          </a:xfrm>
-          <a:prstGeom prst="rect">
-            <a:avLst/>
-          </a:prstGeom>
-          <a:noFill/>
-        </p:spPr>
-        <p:txBody>
-          <a:bodyPr wrap="square" lIns="0" rIns="0" tIns="0" bIns="0">
-            <a:spAutoFit/>
-          </a:bodyPr>
-          <a:lstStyle/>
-          <a:p>
-            <a:pPr algn="l">
-              <a:lnSpc>
-                <a:spcPct val="135000"/>
-              </a:lnSpc>
-              <a:spcAft>
-                <a:spcPts val="600"/>
-              </a:spcAft>
-            </a:pPr>
-            <a:r>
-              <a:rPr sz="1200" b="0">
-                <a:solidFill>
-                  <a:srgbClr val="3F4149"/>
-                </a:solidFill>
-                <a:latin typeface="Helvetica Neue"/>
-              </a:rPr>
-              <a:t>thì cú tụt là do việc dạy thêm, không liên</a:t>
-            </a:r>
-          </a:p>
-          <a:p>
-            <a:pPr algn="l">
-              <a:lnSpc>
-                <a:spcPct val="135000"/>
-              </a:lnSpc>
-              <a:spcAft>
-                <a:spcPts val="600"/>
-              </a:spcAft>
-            </a:pPr>
-            <a:r>
-              <a:rPr sz="1200" b="0">
-                <a:solidFill>
-                  <a:srgbClr val="3F4149"/>
-                </a:solidFill>
-                <a:latin typeface="Helvetica Neue"/>
-              </a:rPr>
-              <a:t>quan tự học. Kết luận phải sửa lần nữa.</a:t>
-            </a:r>
-          </a:p>
-        </p:txBody>
-      </p:sp>
-      <p:sp>
-        <p:nvSpPr>
-          <p:cNvPr id="15" name="TextBox 14"/>
-          <p:cNvSpPr txBox="1"/>
-          <p:nvPr/>
-        </p:nvSpPr>
-        <p:spPr>
-          <a:xfrm>
-            <a:off x="800100" y="5800000"/>
-            <a:ext cx="10591495" cy="300000"/>
-          </a:xfrm>
-          <a:prstGeom prst="rect">
-            <a:avLst/>
-          </a:prstGeom>
-          <a:noFill/>
-        </p:spPr>
-        <p:txBody>
-          <a:bodyPr wrap="square" lIns="0" rIns="0" tIns="0" bIns="0">
-            <a:spAutoFit/>
-          </a:bodyPr>
-          <a:lstStyle/>
-          <a:p>
-            <a:pPr algn="l">
-              <a:spcAft>
-                <a:spcPts val="600"/>
-              </a:spcAft>
-            </a:pPr>
-            <a:r>
-              <a:rPr sz="1050" b="0">
-                <a:solidFill>
-                  <a:srgbClr val="8A8D96"/>
-                </a:solidFill>
-                <a:latin typeface="Helvetica Neue"/>
-              </a:rPr>
-              <a:t>Phần code đã hoàn tất, đang chờ tới lượt GPU.</a:t>
-            </a:r>
-          </a:p>
-        </p:txBody>
-      </p:sp>
-    </p:spTree>
-  </p:cSld>
-  <p:clrMapOvr>
-    <a:masterClrMapping/>
-  </p:clrMapOvr>
-</p:sld>
-</file>
-
-<file path=ppt/slides/slide18.xml><?xml version="1.0" encoding="utf-8"?>
-<p:sld xmlns:a="http://schemas.openxmlformats.org/drawingml/2006/main" xmlns:p="http://schemas.openxmlformats.org/presentationml/2006/main" xmlns:r="http://schemas.openxmlformats.org/officeDocument/2006/relationships">
-  <p:cSld>
-    <p:spTree>
-      <p:nvGrpSpPr>
-        <p:cNvPr id="1" name=""/>
-        <p:cNvGrpSpPr/>
-        <p:nvPr/>
-      </p:nvGrpSpPr>
-      <p:grpSpPr/>
-      <p:sp>
-        <p:nvSpPr>
-          <p:cNvPr id="2" name="TextBox 1"/>
-          <p:cNvSpPr txBox="1"/>
-          <p:nvPr/>
-        </p:nvSpPr>
-        <p:spPr>
-          <a:xfrm>
-            <a:off x="800100" y="430000"/>
-            <a:ext cx="7000000" cy="250000"/>
-          </a:xfrm>
-          <a:prstGeom prst="rect">
-            <a:avLst/>
-          </a:prstGeom>
-          <a:noFill/>
-        </p:spPr>
-        <p:txBody>
-          <a:bodyPr wrap="square" lIns="0" rIns="0" tIns="0" bIns="0">
-            <a:spAutoFit/>
-          </a:bodyPr>
-          <a:lstStyle/>
-          <a:p>
-            <a:pPr algn="l">
-              <a:spcAft>
-                <a:spcPts val="600"/>
-              </a:spcAft>
-            </a:pPr>
-            <a:r>
-              <a:rPr sz="1050" b="1">
-                <a:solidFill>
-                  <a:srgbClr val="9E2B34"/>
-                </a:solidFill>
-                <a:latin typeface="Helvetica Neue"/>
-              </a:rPr>
-              <a:t>HẠN CHẾ</a:t>
-            </a:r>
-          </a:p>
-        </p:txBody>
-      </p:sp>
-      <p:sp>
-        <p:nvSpPr>
-          <p:cNvPr id="3" name="TextBox 2"/>
-          <p:cNvSpPr txBox="1"/>
-          <p:nvPr/>
-        </p:nvSpPr>
-        <p:spPr>
-          <a:xfrm>
-            <a:off x="10491595" y="400000"/>
-            <a:ext cx="900000" cy="400000"/>
-          </a:xfrm>
-          <a:prstGeom prst="rect">
-            <a:avLst/>
-          </a:prstGeom>
-          <a:noFill/>
-        </p:spPr>
-        <p:txBody>
-          <a:bodyPr wrap="square" lIns="0" rIns="0" tIns="0" bIns="0">
-            <a:spAutoFit/>
-          </a:bodyPr>
-          <a:lstStyle/>
-          <a:p>
-            <a:pPr algn="r">
-              <a:spcAft>
-                <a:spcPts val="600"/>
-              </a:spcAft>
-            </a:pPr>
-            <a:r>
-              <a:rPr sz="1500" b="1">
-                <a:solidFill>
-                  <a:srgbClr val="E6E6EA"/>
-                </a:solidFill>
-                <a:latin typeface="Georgia"/>
-              </a:rPr>
-              <a:t>16</a:t>
-            </a:r>
-          </a:p>
-        </p:txBody>
-      </p:sp>
-      <p:sp>
-        <p:nvSpPr>
-          <p:cNvPr id="4" name="TextBox 3"/>
-          <p:cNvSpPr txBox="1"/>
-          <p:nvPr/>
-        </p:nvSpPr>
-        <p:spPr>
-          <a:xfrm>
-            <a:off x="800100" y="790000"/>
-            <a:ext cx="10591495" cy="620000"/>
-          </a:xfrm>
-          <a:prstGeom prst="rect">
-            <a:avLst/>
-          </a:prstGeom>
-          <a:noFill/>
-        </p:spPr>
-        <p:txBody>
-          <a:bodyPr wrap="square" lIns="0" rIns="0" tIns="0" bIns="0">
-            <a:spAutoFit/>
-          </a:bodyPr>
-          <a:lstStyle/>
-          <a:p>
-            <a:pPr algn="l">
-              <a:lnSpc>
-                <a:spcPct val="105000"/>
-              </a:lnSpc>
-              <a:spcAft>
-                <a:spcPts val="600"/>
-              </a:spcAft>
-            </a:pPr>
-            <a:r>
-              <a:rPr sz="2900" b="1">
-                <a:solidFill>
-                  <a:srgbClr val="16161A"/>
-                </a:solidFill>
-                <a:latin typeface="Georgia"/>
-              </a:rPr>
-              <a:t>Ba điểm cần lưu ý khi đọc kết quả</a:t>
-            </a:r>
-          </a:p>
-        </p:txBody>
-      </p:sp>
-      <p:sp>
-        <p:nvSpPr>
-          <p:cNvPr id="5" name="Rounded Rectangle 4"/>
-          <p:cNvSpPr/>
-          <p:nvPr/>
-        </p:nvSpPr>
-        <p:spPr>
-          <a:xfrm>
-            <a:off x="680100" y="2000000"/>
-            <a:ext cx="10831495" cy="1150000"/>
-          </a:xfrm>
-          <a:prstGeom prst="roundRect">
-            <a:avLst>
-              <a:gd name="adj" fmla="val 4000"/>
-            </a:avLst>
-          </a:prstGeom>
-          <a:solidFill>
-            <a:srgbClr val="F5F5F7"/>
-          </a:solidFill>
-          <a:ln>
-            <a:noFill/>
-          </a:ln>
-          <a:effectLst/>
-        </p:spPr>
-        <p:style>
-          <a:lnRef idx="1">
-            <a:schemeClr val="accent1"/>
-          </a:lnRef>
-          <a:fillRef idx="3">
-            <a:schemeClr val="accent1"/>
-          </a:fillRef>
-          <a:effectRef idx="2">
-            <a:schemeClr val="accent1"/>
-          </a:effectRef>
-          <a:fontRef idx="minor">
-            <a:schemeClr val="lt1"/>
-          </a:fontRef>
-        </p:style>
-        <p:txBody>
-          <a:bodyPr rtlCol="0" anchor="ctr"/>
-          <a:lstStyle/>
-          <a:p>
-            <a:pPr algn="ctr"/>
-          </a:p>
-        </p:txBody>
-      </p:sp>
-      <p:sp>
-        <p:nvSpPr>
-          <p:cNvPr id="6" name="TextBox 5"/>
-          <p:cNvSpPr txBox="1"/>
-          <p:nvPr/>
-        </p:nvSpPr>
-        <p:spPr>
-          <a:xfrm>
-            <a:off x="920100" y="2200000"/>
-            <a:ext cx="400000" cy="300000"/>
-          </a:xfrm>
-          <a:prstGeom prst="rect">
-            <a:avLst/>
-          </a:prstGeom>
-          <a:noFill/>
-        </p:spPr>
-        <p:txBody>
-          <a:bodyPr wrap="square" lIns="0" rIns="0" tIns="0" bIns="0">
-            <a:spAutoFit/>
-          </a:bodyPr>
-          <a:lstStyle/>
-          <a:p>
-            <a:pPr algn="l">
-              <a:spcAft>
-                <a:spcPts val="600"/>
-              </a:spcAft>
-            </a:pPr>
-            <a:r>
-              <a:rPr sz="1300" b="1">
-                <a:solidFill>
-                  <a:srgbClr val="9E2B34"/>
-                </a:solidFill>
-                <a:latin typeface="Georgia"/>
-              </a:rPr>
-              <a:t>01</a:t>
-            </a:r>
-          </a:p>
-        </p:txBody>
-      </p:sp>
-      <p:sp>
-        <p:nvSpPr>
-          <p:cNvPr id="7" name="TextBox 6"/>
-          <p:cNvSpPr txBox="1"/>
-          <p:nvPr/>
-        </p:nvSpPr>
-        <p:spPr>
-          <a:xfrm>
-            <a:off x="1500100" y="2190000"/>
-            <a:ext cx="9500000" cy="300000"/>
-          </a:xfrm>
-          <a:prstGeom prst="rect">
-            <a:avLst/>
-          </a:prstGeom>
-          <a:noFill/>
-        </p:spPr>
-        <p:txBody>
-          <a:bodyPr wrap="square" lIns="0" rIns="0" tIns="0" bIns="0">
-            <a:spAutoFit/>
-          </a:bodyPr>
-          <a:lstStyle/>
-          <a:p>
-            <a:pPr algn="l">
-              <a:spcAft>
-                <a:spcPts val="600"/>
-              </a:spcAft>
-            </a:pPr>
-            <a:r>
-              <a:rPr sz="1400" b="1">
-                <a:solidFill>
-                  <a:srgbClr val="16161A"/>
-                </a:solidFill>
-                <a:latin typeface="Helvetica Neue"/>
-              </a:rPr>
-              <a:t>Đề thi chỉ có 150 đề</a:t>
-            </a:r>
-          </a:p>
-        </p:txBody>
-      </p:sp>
-      <p:sp>
-        <p:nvSpPr>
-          <p:cNvPr id="8" name="TextBox 7"/>
-          <p:cNvSpPr txBox="1"/>
-          <p:nvPr/>
-        </p:nvSpPr>
-        <p:spPr>
-          <a:xfrm>
-            <a:off x="1500100" y="2600000"/>
-            <a:ext cx="9500000" cy="450000"/>
-          </a:xfrm>
-          <a:prstGeom prst="rect">
-            <a:avLst/>
-          </a:prstGeom>
-          <a:noFill/>
-        </p:spPr>
-        <p:txBody>
-          <a:bodyPr wrap="square" lIns="0" rIns="0" tIns="0" bIns="0">
-            <a:spAutoFit/>
-          </a:bodyPr>
-          <a:lstStyle/>
-          <a:p>
-            <a:pPr algn="l">
-              <a:lnSpc>
-                <a:spcPct val="130000"/>
-              </a:lnSpc>
-              <a:spcAft>
-                <a:spcPts val="600"/>
-              </a:spcAft>
-            </a:pPr>
-            <a:r>
-              <a:rPr sz="1200" b="0">
-                <a:solidFill>
-                  <a:srgbClr val="3F4149"/>
-                </a:solidFill>
-                <a:latin typeface="Helvetica Neue"/>
-              </a:rPr>
-              <a:t>Mỗi đề đáng 0,67 điểm. Chỉ đổi cách bốc đề thi thôi là điểm vòng 0 đã lệch 4,7 điểm, lớn hơn cả hiệu ứng đang đo.</a:t>
-            </a:r>
-          </a:p>
-        </p:txBody>
-      </p:sp>
-      <p:sp>
-        <p:nvSpPr>
-          <p:cNvPr id="9" name="Rounded Rectangle 8"/>
-          <p:cNvSpPr/>
-          <p:nvPr/>
-        </p:nvSpPr>
-        <p:spPr>
-          <a:xfrm>
-            <a:off x="680100" y="3330000"/>
-            <a:ext cx="10831495" cy="1150000"/>
-          </a:xfrm>
-          <a:prstGeom prst="roundRect">
-            <a:avLst>
-              <a:gd name="adj" fmla="val 4000"/>
-            </a:avLst>
-          </a:prstGeom>
-          <a:solidFill>
-            <a:srgbClr val="F5F5F7"/>
-          </a:solidFill>
-          <a:ln>
-            <a:noFill/>
-          </a:ln>
-          <a:effectLst/>
-        </p:spPr>
-        <p:style>
-          <a:lnRef idx="1">
-            <a:schemeClr val="accent1"/>
-          </a:lnRef>
-          <a:fillRef idx="3">
-            <a:schemeClr val="accent1"/>
-          </a:fillRef>
-          <a:effectRef idx="2">
-            <a:schemeClr val="accent1"/>
-          </a:effectRef>
-          <a:fontRef idx="minor">
-            <a:schemeClr val="lt1"/>
-          </a:fontRef>
-        </p:style>
-        <p:txBody>
-          <a:bodyPr rtlCol="0" anchor="ctr"/>
-          <a:lstStyle/>
-          <a:p>
-            <a:pPr algn="ctr"/>
-          </a:p>
-        </p:txBody>
-      </p:sp>
-      <p:sp>
-        <p:nvSpPr>
-          <p:cNvPr id="10" name="TextBox 9"/>
-          <p:cNvSpPr txBox="1"/>
-          <p:nvPr/>
-        </p:nvSpPr>
-        <p:spPr>
-          <a:xfrm>
-            <a:off x="920100" y="3530000"/>
-            <a:ext cx="400000" cy="300000"/>
-          </a:xfrm>
-          <a:prstGeom prst="rect">
-            <a:avLst/>
-          </a:prstGeom>
-          <a:noFill/>
-        </p:spPr>
-        <p:txBody>
-          <a:bodyPr wrap="square" lIns="0" rIns="0" tIns="0" bIns="0">
-            <a:spAutoFit/>
-          </a:bodyPr>
-          <a:lstStyle/>
-          <a:p>
-            <a:pPr algn="l">
-              <a:spcAft>
-                <a:spcPts val="600"/>
-              </a:spcAft>
-            </a:pPr>
-            <a:r>
-              <a:rPr sz="1300" b="1">
-                <a:solidFill>
-                  <a:srgbClr val="9E2B34"/>
-                </a:solidFill>
-                <a:latin typeface="Georgia"/>
-              </a:rPr>
-              <a:t>02</a:t>
-            </a:r>
-          </a:p>
-        </p:txBody>
-      </p:sp>
-      <p:sp>
-        <p:nvSpPr>
-          <p:cNvPr id="11" name="TextBox 10"/>
-          <p:cNvSpPr txBox="1"/>
-          <p:nvPr/>
-        </p:nvSpPr>
-        <p:spPr>
-          <a:xfrm>
-            <a:off x="1500100" y="3520000"/>
-            <a:ext cx="9500000" cy="300000"/>
-          </a:xfrm>
-          <a:prstGeom prst="rect">
-            <a:avLst/>
-          </a:prstGeom>
-          <a:noFill/>
-        </p:spPr>
-        <p:txBody>
-          <a:bodyPr wrap="square" lIns="0" rIns="0" tIns="0" bIns="0">
-            <a:spAutoFit/>
-          </a:bodyPr>
-          <a:lstStyle/>
-          <a:p>
-            <a:pPr algn="l">
-              <a:spcAft>
-                <a:spcPts val="600"/>
-              </a:spcAft>
-            </a:pPr>
-            <a:r>
-              <a:rPr sz="1400" b="1">
-                <a:solidFill>
-                  <a:srgbClr val="16161A"/>
-                </a:solidFill>
-                <a:latin typeface="Helvetica Neue"/>
-              </a:rPr>
-              <a:t>Mỗi cấu hình mới chạy 2 lần</a:t>
-            </a:r>
-          </a:p>
-        </p:txBody>
-      </p:sp>
-      <p:sp>
-        <p:nvSpPr>
-          <p:cNvPr id="12" name="TextBox 11"/>
-          <p:cNvSpPr txBox="1"/>
-          <p:nvPr/>
-        </p:nvSpPr>
-        <p:spPr>
-          <a:xfrm>
-            <a:off x="1500100" y="3930000"/>
-            <a:ext cx="9500000" cy="450000"/>
-          </a:xfrm>
-          <a:prstGeom prst="rect">
-            <a:avLst/>
-          </a:prstGeom>
-          <a:noFill/>
-        </p:spPr>
-        <p:txBody>
-          <a:bodyPr wrap="square" lIns="0" rIns="0" tIns="0" bIns="0">
-            <a:spAutoFit/>
-          </a:bodyPr>
-          <a:lstStyle/>
-          <a:p>
-            <a:pPr algn="l">
-              <a:lnSpc>
-                <a:spcPct val="130000"/>
-              </a:lnSpc>
-              <a:spcAft>
-                <a:spcPts val="600"/>
-              </a:spcAft>
-            </a:pPr>
-            <a:r>
-              <a:rPr sz="1200" b="0">
-                <a:solidFill>
-                  <a:srgbClr val="3F4149"/>
-                </a:solidFill>
-                <a:latin typeface="Helvetica Neue"/>
-              </a:rPr>
-              <a:t>Riêng lần chạy C và các lần chạy cũ mới có 1 lần. Chưa đủ cơ sở để khẳng định về cú tụt 12,7 điểm của GSM8K.</a:t>
-            </a:r>
-          </a:p>
-        </p:txBody>
-      </p:sp>
-      <p:sp>
-        <p:nvSpPr>
-          <p:cNvPr id="13" name="Rounded Rectangle 12"/>
-          <p:cNvSpPr/>
-          <p:nvPr/>
-        </p:nvSpPr>
-        <p:spPr>
-          <a:xfrm>
-            <a:off x="680100" y="4660000"/>
-            <a:ext cx="10831495" cy="1150000"/>
-          </a:xfrm>
-          <a:prstGeom prst="roundRect">
-            <a:avLst>
-              <a:gd name="adj" fmla="val 4000"/>
-            </a:avLst>
-          </a:prstGeom>
-          <a:solidFill>
-            <a:srgbClr val="F5F5F7"/>
-          </a:solidFill>
-          <a:ln>
-            <a:noFill/>
-          </a:ln>
-          <a:effectLst/>
-        </p:spPr>
-        <p:style>
-          <a:lnRef idx="1">
-            <a:schemeClr val="accent1"/>
-          </a:lnRef>
-          <a:fillRef idx="3">
-            <a:schemeClr val="accent1"/>
-          </a:fillRef>
-          <a:effectRef idx="2">
-            <a:schemeClr val="accent1"/>
-          </a:effectRef>
-          <a:fontRef idx="minor">
-            <a:schemeClr val="lt1"/>
-          </a:fontRef>
-        </p:style>
-        <p:txBody>
-          <a:bodyPr rtlCol="0" anchor="ctr"/>
-          <a:lstStyle/>
-          <a:p>
-            <a:pPr algn="ctr"/>
-          </a:p>
-        </p:txBody>
-      </p:sp>
-      <p:sp>
-        <p:nvSpPr>
-          <p:cNvPr id="14" name="TextBox 13"/>
-          <p:cNvSpPr txBox="1"/>
-          <p:nvPr/>
-        </p:nvSpPr>
-        <p:spPr>
-          <a:xfrm>
-            <a:off x="920100" y="4860000"/>
-            <a:ext cx="400000" cy="300000"/>
-          </a:xfrm>
-          <a:prstGeom prst="rect">
-            <a:avLst/>
-          </a:prstGeom>
-          <a:noFill/>
-        </p:spPr>
-        <p:txBody>
-          <a:bodyPr wrap="square" lIns="0" rIns="0" tIns="0" bIns="0">
-            <a:spAutoFit/>
-          </a:bodyPr>
-          <a:lstStyle/>
-          <a:p>
-            <a:pPr algn="l">
-              <a:spcAft>
-                <a:spcPts val="600"/>
-              </a:spcAft>
-            </a:pPr>
-            <a:r>
-              <a:rPr sz="1300" b="1">
-                <a:solidFill>
-                  <a:srgbClr val="9E2B34"/>
-                </a:solidFill>
-                <a:latin typeface="Georgia"/>
-              </a:rPr>
-              <a:t>03</a:t>
-            </a:r>
-          </a:p>
-        </p:txBody>
-      </p:sp>
-      <p:sp>
-        <p:nvSpPr>
-          <p:cNvPr id="15" name="TextBox 14"/>
-          <p:cNvSpPr txBox="1"/>
-          <p:nvPr/>
-        </p:nvSpPr>
-        <p:spPr>
-          <a:xfrm>
-            <a:off x="1500100" y="4850000"/>
-            <a:ext cx="9500000" cy="300000"/>
-          </a:xfrm>
-          <a:prstGeom prst="rect">
-            <a:avLst/>
-          </a:prstGeom>
-          <a:noFill/>
-        </p:spPr>
-        <p:txBody>
-          <a:bodyPr wrap="square" lIns="0" rIns="0" tIns="0" bIns="0">
-            <a:spAutoFit/>
-          </a:bodyPr>
-          <a:lstStyle/>
-          <a:p>
-            <a:pPr algn="l">
-              <a:spcAft>
-                <a:spcPts val="600"/>
-              </a:spcAft>
-            </a:pPr>
-            <a:r>
-              <a:rPr sz="1400" b="1">
-                <a:solidFill>
-                  <a:srgbClr val="16161A"/>
-                </a:solidFill>
-                <a:latin typeface="Helvetica Neue"/>
-              </a:rPr>
-              <a:t>Lần chạy mới khác lần cũ ba chỗ</a:t>
-            </a:r>
-          </a:p>
-        </p:txBody>
-      </p:sp>
-      <p:sp>
-        <p:nvSpPr>
-          <p:cNvPr id="16" name="TextBox 15"/>
-          <p:cNvSpPr txBox="1"/>
-          <p:nvPr/>
-        </p:nvSpPr>
-        <p:spPr>
-          <a:xfrm>
-            <a:off x="1500100" y="5260000"/>
-            <a:ext cx="9500000" cy="450000"/>
-          </a:xfrm>
-          <a:prstGeom prst="rect">
-            <a:avLst/>
-          </a:prstGeom>
-          <a:noFill/>
-        </p:spPr>
-        <p:txBody>
-          <a:bodyPr wrap="square" lIns="0" rIns="0" tIns="0" bIns="0">
-            <a:spAutoFit/>
-          </a:bodyPr>
-          <a:lstStyle/>
-          <a:p>
-            <a:pPr algn="l">
-              <a:lnSpc>
-                <a:spcPct val="130000"/>
-              </a:lnSpc>
-              <a:spcAft>
-                <a:spcPts val="600"/>
-              </a:spcAft>
-            </a:pPr>
-            <a:r>
-              <a:rPr sz="1200" b="0">
-                <a:solidFill>
-                  <a:srgbClr val="3F4149"/>
-                </a:solidFill>
-                <a:latin typeface="Helvetica Neue"/>
-              </a:rPr>
-              <a:t>Bỏ gộp bộ đề, thêm đề thi riêng, giảm số đề. Nên kết luận chỉ dựa trên so sánh A với B, vì hai lần chạy đó chỉ khác nhau đúng một biến.</a:t>
-            </a:r>
-          </a:p>
-        </p:txBody>
-      </p:sp>
-    </p:spTree>
-  </p:cSld>
-  <p:clrMapOvr>
-    <a:masterClrMapping/>
-  </p:clrMapOvr>
-</p:sld>
-</file>
-
-<file path=ppt/slides/slide19.xml><?xml version="1.0" encoding="utf-8"?>
-<p:sld xmlns:a="http://schemas.openxmlformats.org/drawingml/2006/main" xmlns:p="http://schemas.openxmlformats.org/presentationml/2006/main" xmlns:r="http://schemas.openxmlformats.org/officeDocument/2006/relationships">
-  <p:cSld>
-    <p:spTree>
-      <p:nvGrpSpPr>
-        <p:cNvPr id="1" name=""/>
-        <p:cNvGrpSpPr/>
-        <p:nvPr/>
-      </p:nvGrpSpPr>
-      <p:grpSpPr/>
-      <p:sp>
-        <p:nvSpPr>
-          <p:cNvPr id="2" name="TextBox 1"/>
-          <p:cNvSpPr txBox="1"/>
-          <p:nvPr/>
-        </p:nvSpPr>
-        <p:spPr>
-          <a:xfrm>
-            <a:off x="800100" y="430000"/>
-            <a:ext cx="7000000" cy="250000"/>
-          </a:xfrm>
-          <a:prstGeom prst="rect">
-            <a:avLst/>
-          </a:prstGeom>
-          <a:noFill/>
-        </p:spPr>
-        <p:txBody>
-          <a:bodyPr wrap="square" lIns="0" rIns="0" tIns="0" bIns="0">
-            <a:spAutoFit/>
-          </a:bodyPr>
-          <a:lstStyle/>
-          <a:p>
-            <a:pPr algn="l">
-              <a:spcAft>
-                <a:spcPts val="600"/>
-              </a:spcAft>
-            </a:pPr>
-            <a:r>
-              <a:rPr sz="1050" b="1">
-                <a:solidFill>
-                  <a:srgbClr val="9E2B34"/>
-                </a:solidFill>
-                <a:latin typeface="Helvetica Neue"/>
-              </a:rPr>
-              <a:t>TÓM TẮT</a:t>
-            </a:r>
-          </a:p>
-        </p:txBody>
-      </p:sp>
-      <p:sp>
-        <p:nvSpPr>
-          <p:cNvPr id="3" name="TextBox 2"/>
-          <p:cNvSpPr txBox="1"/>
-          <p:nvPr/>
-        </p:nvSpPr>
-        <p:spPr>
-          <a:xfrm>
-            <a:off x="10491595" y="400000"/>
-            <a:ext cx="900000" cy="400000"/>
-          </a:xfrm>
-          <a:prstGeom prst="rect">
-            <a:avLst/>
-          </a:prstGeom>
-          <a:noFill/>
-        </p:spPr>
-        <p:txBody>
-          <a:bodyPr wrap="square" lIns="0" rIns="0" tIns="0" bIns="0">
-            <a:spAutoFit/>
-          </a:bodyPr>
-          <a:lstStyle/>
-          <a:p>
-            <a:pPr algn="r">
-              <a:spcAft>
-                <a:spcPts val="600"/>
-              </a:spcAft>
-            </a:pPr>
-            <a:r>
-              <a:rPr sz="1500" b="1">
-                <a:solidFill>
-                  <a:srgbClr val="E6E6EA"/>
-                </a:solidFill>
-                <a:latin typeface="Georgia"/>
-              </a:rPr>
-              <a:t>17</a:t>
             </a:r>
           </a:p>
         </p:txBody>
@@ -9315,7 +8680,7 @@
                 </a:solidFill>
                 <a:latin typeface="Georgia"/>
               </a:rPr>
-              <a:t>Thí nghiệm đối chứng cho thấy giả thuyết ban đầu không đúng. Nguyên nhân đã xác định được:</a:t>
+              <a:t>Câu hỏi của đề tài: tự học có làm model giỏi toán hơn thật không?</a:t>
             </a:r>
           </a:p>
           <a:p>
@@ -9334,7 +8699,7 @@
                 </a:solidFill>
                 <a:latin typeface="Georgia"/>
               </a:rPr>
-              <a:t>lỗi của máy chấm tuy nặng nhưng chỉ xảy ra ở 0,55% số bài.</a:t>
+              <a:t>Với model 1.5B: không. Model đứng yên hoặc hơi dở đi, và không phải do máy chấm.</a:t>
             </a:r>
           </a:p>
           <a:p>
@@ -9353,7 +8718,7 @@
                 </a:solidFill>
                 <a:latin typeface="Georgia"/>
               </a:rPr>
-              <a:t>Đề tài chuyển sang cảnh báo về thiết kế đo — hẹp hơn, nhưng có cơ sở vững.</a:t>
+              <a:t>Cú sụp thấy ở tuần 1 và tuần 2 phần lớn do cách đo sai.</a:t>
             </a:r>
           </a:p>
         </p:txBody>
@@ -9431,7 +8796,7 @@
                 </a:solidFill>
                 <a:latin typeface="Helvetica Neue"/>
               </a:rPr>
-              <a:t>7 lần chạy, khoảng 40 giờ GPU. Phát hiện 2 lỗi độc lập trong máy chấm, cả hai đã vá và có test.</a:t>
+              <a:t>7 lần chạy, khoảng 40 giờ GPU. Sửa thiết kế đo, có thí nghiệm đối chứng chạy lặp hai lần.</a:t>
             </a:r>
           </a:p>
         </p:txBody>
@@ -9509,7 +8874,7 @@
                 </a:solidFill>
                 <a:latin typeface="Helvetica Neue"/>
               </a:rPr>
-              <a:t>Giả thuyết ban đầu không đúng, và đo được nguyên nhân vì sao.</a:t>
+              <a:t>Máy chấm sai không làm model dở đi. Tự học cũng không làm model giỏi lên.</a:t>
             </a:r>
           </a:p>
         </p:txBody>
@@ -9587,7 +8952,7 @@
                 </a:solidFill>
                 <a:latin typeface="Helvetica Neue"/>
               </a:rPr>
-              <a:t>Chạy thử lỗi phổ biến (\boxed) để tìm ngưỡng lỗi máy chấm bắt đầu gây hại.</a:t>
+              <a:t>Ba thí nghiệm tìm nguyên nhân: chạy lại GSM8K, bỏ bước lọc, dạy bằng lời giải sách.</a:t>
             </a:r>
           </a:p>
         </p:txBody>
@@ -9665,7 +9030,7 @@
                 </a:solidFill>
                 <a:latin typeface="Helvetica Neue"/>
               </a:rPr>
-              <a:t>Viết lại bài báo theo kết luận mới.</a:t>
+              <a:t>Viết lại bài báo theo câu trả lời này.</a:t>
             </a:r>
           </a:p>
         </p:txBody>
@@ -10715,7 +10080,7 @@
                 </a:solidFill>
                 <a:latin typeface="Helvetica Neue"/>
               </a:rPr>
-              <a:t>Nguyên nhân và đề tài tiếp theo</a:t>
+              <a:t>Trả lời câu hỏi đề tài</a:t>
             </a:r>
           </a:p>
         </p:txBody>
@@ -10754,7 +10119,7 @@
                 </a:solidFill>
                 <a:latin typeface="Helvetica Neue"/>
               </a:rPr>
-              <a:t>hướng nghiên cứu sau khi điều chỉnh</a:t>
+              <a:t>và ba thí nghiệm tiếp theo</a:t>
             </a:r>
           </a:p>
         </p:txBody>
@@ -11151,7 +10516,7 @@
         <p:spPr>
           <a:xfrm>
             <a:off x="800100" y="4870000"/>
-            <a:ext cx="10591495" cy="700000"/>
+            <a:ext cx="10591495" cy="900000"/>
           </a:xfrm>
           <a:prstGeom prst="rect">
             <a:avLst/>
@@ -11173,13 +10538,13 @@
               </a:spcAft>
             </a:pPr>
             <a:r>
-              <a:rPr sz="1600" b="1">
+              <a:rPr sz="1500" b="1">
                 <a:solidFill>
                   <a:srgbClr val="9E2B34"/>
                 </a:solidFill>
                 <a:latin typeface="Georgia"/>
               </a:rPr>
-              <a:t>Máy chấm có sai, và sai theo một quy luật cố định.</a:t>
+              <a:t>Sau nhiều vòng tự học, model giỏi toán hơn thật, hay chỉ học cách viết mà máy chấm ưa?</a:t>
             </a:r>
           </a:p>
           <a:p>
@@ -11192,13 +10557,13 @@
               </a:spcAft>
             </a:pPr>
             <a:r>
-              <a:rPr sz="1600" b="1">
+              <a:rPr sz="1500" b="1">
                 <a:solidFill>
                   <a:srgbClr val="9E2B34"/>
                 </a:solidFill>
                 <a:latin typeface="Georgia"/>
               </a:rPr>
-              <a:t>Sau nhiều vòng tự học, model có bị dở đi không?</a:t>
+              <a:t>Giả thuyết ban đầu: máy chấm sai theo một quy luật cố định sẽ làm model dở đi.</a:t>
             </a:r>
           </a:p>
         </p:txBody>
